--- a/RAC/15장/15장_동적데이터베이스서비스.pptx
+++ b/RAC/15장/15장_동적데이터베이스서비스.pptx
@@ -4,48 +4,51 @@
   <p:sldMasterIdLst>
     <p:sldMasterId id="2147483648" r:id="rId1"/>
   </p:sldMasterIdLst>
+  <p:notesMasterIdLst>
+    <p:notesMasterId r:id="rId41"/>
+  </p:notesMasterIdLst>
   <p:sldIdLst>
-    <p:sldId id="256" r:id="rId7"/>
-    <p:sldId id="257" r:id="rId8"/>
-    <p:sldId id="258" r:id="rId9"/>
-    <p:sldId id="259" r:id="rId10"/>
-    <p:sldId id="260" r:id="rId12"/>
-    <p:sldId id="261" r:id="rId13"/>
-    <p:sldId id="262" r:id="rId14"/>
-    <p:sldId id="263" r:id="rId15"/>
-    <p:sldId id="264" r:id="rId16"/>
-    <p:sldId id="265" r:id="rId17"/>
-    <p:sldId id="266" r:id="rId18"/>
-    <p:sldId id="267" r:id="rId19"/>
-    <p:sldId id="268" r:id="rId20"/>
-    <p:sldId id="269" r:id="rId21"/>
-    <p:sldId id="270" r:id="rId22"/>
-    <p:sldId id="271" r:id="rId23"/>
-    <p:sldId id="272" r:id="rId24"/>
-    <p:sldId id="273" r:id="rId25"/>
-    <p:sldId id="274" r:id="rId26"/>
-    <p:sldId id="275" r:id="rId27"/>
-    <p:sldId id="276" r:id="rId28"/>
-    <p:sldId id="277" r:id="rId29"/>
-    <p:sldId id="278" r:id="rId30"/>
-    <p:sldId id="279" r:id="rId31"/>
-    <p:sldId id="280" r:id="rId32"/>
-    <p:sldId id="281" r:id="rId33"/>
-    <p:sldId id="282" r:id="rId34"/>
-    <p:sldId id="283" r:id="rId35"/>
-    <p:sldId id="284" r:id="rId36"/>
-    <p:sldId id="285" r:id="rId37"/>
-    <p:sldId id="286" r:id="rId38"/>
-    <p:sldId id="287" r:id="rId39"/>
-    <p:sldId id="288" r:id="rId40"/>
-    <p:sldId id="289" r:id="rId41"/>
-    <p:sldId id="290" r:id="rId42"/>
-    <p:sldId id="291" r:id="rId43"/>
-    <p:sldId id="292" r:id="rId44"/>
-    <p:sldId id="293" r:id="rId45"/>
-    <p:sldId id="294" r:id="rId46"/>
+    <p:sldId id="256" r:id="rId2"/>
+    <p:sldId id="257" r:id="rId3"/>
+    <p:sldId id="258" r:id="rId4"/>
+    <p:sldId id="259" r:id="rId5"/>
+    <p:sldId id="260" r:id="rId6"/>
+    <p:sldId id="261" r:id="rId7"/>
+    <p:sldId id="262" r:id="rId8"/>
+    <p:sldId id="263" r:id="rId9"/>
+    <p:sldId id="264" r:id="rId10"/>
+    <p:sldId id="265" r:id="rId11"/>
+    <p:sldId id="266" r:id="rId12"/>
+    <p:sldId id="267" r:id="rId13"/>
+    <p:sldId id="268" r:id="rId14"/>
+    <p:sldId id="269" r:id="rId15"/>
+    <p:sldId id="270" r:id="rId16"/>
+    <p:sldId id="271" r:id="rId17"/>
+    <p:sldId id="272" r:id="rId18"/>
+    <p:sldId id="273" r:id="rId19"/>
+    <p:sldId id="274" r:id="rId20"/>
+    <p:sldId id="275" r:id="rId21"/>
+    <p:sldId id="276" r:id="rId22"/>
+    <p:sldId id="277" r:id="rId23"/>
+    <p:sldId id="278" r:id="rId24"/>
+    <p:sldId id="279" r:id="rId25"/>
+    <p:sldId id="280" r:id="rId26"/>
+    <p:sldId id="281" r:id="rId27"/>
+    <p:sldId id="282" r:id="rId28"/>
+    <p:sldId id="283" r:id="rId29"/>
+    <p:sldId id="284" r:id="rId30"/>
+    <p:sldId id="285" r:id="rId31"/>
+    <p:sldId id="286" r:id="rId32"/>
+    <p:sldId id="287" r:id="rId33"/>
+    <p:sldId id="288" r:id="rId34"/>
+    <p:sldId id="289" r:id="rId35"/>
+    <p:sldId id="290" r:id="rId36"/>
+    <p:sldId id="291" r:id="rId37"/>
+    <p:sldId id="292" r:id="rId38"/>
+    <p:sldId id="293" r:id="rId39"/>
+    <p:sldId id="294" r:id="rId40"/>
   </p:sldIdLst>
-  <p:sldSz cx="12191695" cy="6858000" type="screen4x3"/>
+  <p:sldSz cx="12192000" cy="6858000"/>
   <p:notesSz cx="6858000" cy="9144000"/>
   <p:defaultTextStyle>
     <a:defPPr>
@@ -142,11 +145,27 @@
       </a:defRPr>
     </a:lvl9pPr>
   </p:defaultTextStyle>
+  <p:extLst>
+    <p:ext uri="{EFAFB233-063F-42B5-8137-9DF3F51BA10A}">
+      <p15:sldGuideLst xmlns:p15="http://schemas.microsoft.com/office/powerpoint/2012/main">
+        <p15:guide id="1" orient="horz" pos="2160">
+          <p15:clr>
+            <a:srgbClr val="A4A3A4"/>
+          </p15:clr>
+        </p15:guide>
+        <p15:guide id="2" pos="2880">
+          <p15:clr>
+            <a:srgbClr val="A4A3A4"/>
+          </p15:clr>
+        </p15:guide>
+      </p15:sldGuideLst>
+    </p:ext>
+  </p:extLst>
 </p:presentation>
 </file>
 
 <file path=ppt/notesMasters/notesMaster1.xml><?xml version="1.0" encoding="utf-8"?>
-<p:notesMaster xmlns:a="http://schemas.openxmlformats.org/drawingml/2006/main" xmlns:p="http://schemas.openxmlformats.org/presentationml/2006/main" xmlns:r="http://schemas.openxmlformats.org/officeDocument/2006/relationships">
+<p:notesMaster xmlns:a="http://schemas.openxmlformats.org/drawingml/2006/main" xmlns:r="http://schemas.openxmlformats.org/officeDocument/2006/relationships" xmlns:p="http://schemas.openxmlformats.org/presentationml/2006/main">
   <p:cSld>
     <p:bg>
       <p:bgRef idx="1001">
@@ -169,7 +188,7 @@
       </p:grpSpPr>
       <p:sp>
         <p:nvSpPr>
-          <p:cNvPr id="2" name="Header Placeholder 1"/>
+          <p:cNvPr id="2" name="머리글 개체 틀 1"/>
           <p:cNvSpPr>
             <a:spLocks noGrp="1"/>
           </p:cNvSpPr>
@@ -180,7 +199,7 @@
         <p:spPr>
           <a:xfrm>
             <a:off x="0" y="0"/>
-            <a:ext cx="2971800" cy="457200"/>
+            <a:ext cx="2971800" cy="458788"/>
           </a:xfrm>
           <a:prstGeom prst="rect">
             <a:avLst/>
@@ -194,13 +213,13 @@
             </a:lvl1pPr>
           </a:lstStyle>
           <a:p>
-            <a:endParaRPr lang="en-US"/>
-          </a:p>
-        </p:txBody>
-      </p:sp>
-      <p:sp>
-        <p:nvSpPr>
-          <p:cNvPr id="3" name="Date Placeholder 2"/>
+            <a:endParaRPr lang="ko-KR" altLang="en-US"/>
+          </a:p>
+        </p:txBody>
+      </p:sp>
+      <p:sp>
+        <p:nvSpPr>
+          <p:cNvPr id="3" name="날짜 개체 틀 2"/>
           <p:cNvSpPr>
             <a:spLocks noGrp="1"/>
           </p:cNvSpPr>
@@ -211,7 +230,7 @@
         <p:spPr>
           <a:xfrm>
             <a:off x="3884613" y="0"/>
-            <a:ext cx="2971800" cy="457200"/>
+            <a:ext cx="2971800" cy="458788"/>
           </a:xfrm>
           <a:prstGeom prst="rect">
             <a:avLst/>
@@ -225,17 +244,17 @@
             </a:lvl1pPr>
           </a:lstStyle>
           <a:p>
-            <a:fld id="{0F89C1C7-3DCD-1040-A9CF-14679D8B5DDD}" type="datetimeFigureOut">
-              <a:rPr lang="en-US" smtClean="0"/>
-              <a:t>10/17/16</a:t>
+            <a:fld id="{B087943B-689D-4B3C-AEE8-CE9C9276B421}" type="datetimeFigureOut">
+              <a:rPr lang="ko-KR" altLang="en-US" smtClean="0"/>
+              <a:t>2026-10-29</a:t>
             </a:fld>
-            <a:endParaRPr lang="en-US"/>
-          </a:p>
-        </p:txBody>
-      </p:sp>
-      <p:sp>
-        <p:nvSpPr>
-          <p:cNvPr id="4" name="Slide Image Placeholder 3"/>
+            <a:endParaRPr lang="ko-KR" altLang="en-US"/>
+          </a:p>
+        </p:txBody>
+      </p:sp>
+      <p:sp>
+        <p:nvSpPr>
+          <p:cNvPr id="4" name="슬라이드 이미지 개체 틀 3"/>
           <p:cNvSpPr>
             <a:spLocks noGrp="1" noRot="1" noChangeAspect="1"/>
           </p:cNvSpPr>
@@ -245,8 +264,8 @@
         </p:nvSpPr>
         <p:spPr>
           <a:xfrm>
-            <a:off x="1143000" y="685800"/>
-            <a:ext cx="4572000" cy="3429000"/>
+            <a:off x="685800" y="1143000"/>
+            <a:ext cx="5486400" cy="3086100"/>
           </a:xfrm>
           <a:prstGeom prst="rect">
             <a:avLst/>
@@ -262,13 +281,13 @@
           <a:bodyPr vert="horz" lIns="91440" tIns="45720" rIns="91440" bIns="45720" rtlCol="0" anchor="ctr"/>
           <a:lstStyle/>
           <a:p>
-            <a:endParaRPr lang="en-US"/>
-          </a:p>
-        </p:txBody>
-      </p:sp>
-      <p:sp>
-        <p:nvSpPr>
-          <p:cNvPr id="5" name="Notes Placeholder 4"/>
+            <a:endParaRPr lang="ko-KR" altLang="en-US"/>
+          </a:p>
+        </p:txBody>
+      </p:sp>
+      <p:sp>
+        <p:nvSpPr>
+          <p:cNvPr id="5" name="슬라이드 노트 개체 틀 4"/>
           <p:cNvSpPr>
             <a:spLocks noGrp="1"/>
           </p:cNvSpPr>
@@ -278,8 +297,8 @@
         </p:nvSpPr>
         <p:spPr>
           <a:xfrm>
-            <a:off x="685800" y="4343400"/>
-            <a:ext cx="5486400" cy="4114800"/>
+            <a:off x="685800" y="4400550"/>
+            <a:ext cx="5486400" cy="3600450"/>
           </a:xfrm>
           <a:prstGeom prst="rect">
             <a:avLst/>
@@ -291,44 +310,43 @@
           <a:p>
             <a:pPr lvl="0"/>
             <a:r>
-              <a:rPr lang="en-US" smtClean="0"/>
-              <a:t>Click to edit Master text styles</a:t>
+              <a:rPr lang="ko-KR" altLang="en-US"/>
+              <a:t>마스터 텍스트 스타일을 편집하려면 클릭</a:t>
             </a:r>
           </a:p>
           <a:p>
             <a:pPr lvl="1"/>
             <a:r>
-              <a:rPr lang="en-US" smtClean="0"/>
-              <a:t>Second level</a:t>
+              <a:rPr lang="ko-KR" altLang="en-US"/>
+              <a:t>두 번째 수준</a:t>
             </a:r>
           </a:p>
           <a:p>
             <a:pPr lvl="2"/>
             <a:r>
-              <a:rPr lang="en-US" smtClean="0"/>
-              <a:t>Third level</a:t>
+              <a:rPr lang="ko-KR" altLang="en-US"/>
+              <a:t>세 번째 수준</a:t>
             </a:r>
           </a:p>
           <a:p>
             <a:pPr lvl="3"/>
             <a:r>
-              <a:rPr lang="en-US" smtClean="0"/>
-              <a:t>Fourth level</a:t>
+              <a:rPr lang="ko-KR" altLang="en-US"/>
+              <a:t>네 번째 수준</a:t>
             </a:r>
           </a:p>
           <a:p>
             <a:pPr lvl="4"/>
             <a:r>
-              <a:rPr lang="en-US" smtClean="0"/>
-              <a:t>Fifth level</a:t>
-            </a:r>
-            <a:endParaRPr lang="en-US"/>
-          </a:p>
-        </p:txBody>
-      </p:sp>
-      <p:sp>
-        <p:nvSpPr>
-          <p:cNvPr id="6" name="Footer Placeholder 5"/>
+              <a:rPr lang="ko-KR" altLang="en-US"/>
+              <a:t>다섯 번째 수준</a:t>
+            </a:r>
+          </a:p>
+        </p:txBody>
+      </p:sp>
+      <p:sp>
+        <p:nvSpPr>
+          <p:cNvPr id="6" name="바닥글 개체 틀 5"/>
           <p:cNvSpPr>
             <a:spLocks noGrp="1"/>
           </p:cNvSpPr>
@@ -339,7 +357,7 @@
         <p:spPr>
           <a:xfrm>
             <a:off x="0" y="8685213"/>
-            <a:ext cx="2971800" cy="457200"/>
+            <a:ext cx="2971800" cy="458787"/>
           </a:xfrm>
           <a:prstGeom prst="rect">
             <a:avLst/>
@@ -353,13 +371,13 @@
             </a:lvl1pPr>
           </a:lstStyle>
           <a:p>
-            <a:endParaRPr lang="en-US"/>
-          </a:p>
-        </p:txBody>
-      </p:sp>
-      <p:sp>
-        <p:nvSpPr>
-          <p:cNvPr id="7" name="Slide Number Placeholder 6"/>
+            <a:endParaRPr lang="ko-KR" altLang="en-US"/>
+          </a:p>
+        </p:txBody>
+      </p:sp>
+      <p:sp>
+        <p:nvSpPr>
+          <p:cNvPr id="7" name="슬라이드 번호 개체 틀 6"/>
           <p:cNvSpPr>
             <a:spLocks noGrp="1"/>
           </p:cNvSpPr>
@@ -370,7 +388,7 @@
         <p:spPr>
           <a:xfrm>
             <a:off x="3884613" y="8685213"/>
-            <a:ext cx="2971800" cy="457200"/>
+            <a:ext cx="2971800" cy="458787"/>
           </a:xfrm>
           <a:prstGeom prst="rect">
             <a:avLst/>
@@ -384,24 +402,24 @@
             </a:lvl1pPr>
           </a:lstStyle>
           <a:p>
-            <a:fld id="{BB5E49A5-4136-284D-997B-48E1D791AD67}" type="slidenum">
-              <a:rPr lang="en-US" smtClean="0"/>
+            <a:fld id="{EB44D8C7-8314-4735-905E-ADBA105BE2CD}" type="slidenum">
+              <a:rPr lang="ko-KR" altLang="en-US" smtClean="0"/>
               <a:t>‹#›</a:t>
             </a:fld>
-            <a:endParaRPr lang="en-US"/>
+            <a:endParaRPr lang="ko-KR" altLang="en-US"/>
           </a:p>
         </p:txBody>
       </p:sp>
     </p:spTree>
     <p:extLst>
       <p:ext uri="{BB962C8B-B14F-4D97-AF65-F5344CB8AC3E}">
-        <p14:creationId xmlns:p14="http://schemas.microsoft.com/office/powerpoint/2010/main" val="2623252185"/>
+        <p14:creationId xmlns:p14="http://schemas.microsoft.com/office/powerpoint/2010/main" val="3561991864"/>
       </p:ext>
     </p:extLst>
   </p:cSld>
   <p:clrMap bg1="lt1" tx1="dk1" bg2="lt2" tx2="dk2" accent1="accent1" accent2="accent2" accent3="accent3" accent4="accent4" accent5="accent5" accent6="accent6" hlink="hlink" folHlink="folHlink"/>
   <p:notesStyle>
-    <a:lvl1pPr marL="0" algn="l" defTabSz="457200" rtl="0" eaLnBrk="1" latinLnBrk="0" hangingPunct="1">
+    <a:lvl1pPr marL="0" algn="l" defTabSz="914400" rtl="0" eaLnBrk="1" latinLnBrk="1" hangingPunct="1">
       <a:defRPr sz="1200" kern="1200">
         <a:solidFill>
           <a:schemeClr val="tx1"/>
@@ -411,7 +429,7 @@
         <a:cs typeface="+mn-cs"/>
       </a:defRPr>
     </a:lvl1pPr>
-    <a:lvl2pPr marL="457200" algn="l" defTabSz="457200" rtl="0" eaLnBrk="1" latinLnBrk="0" hangingPunct="1">
+    <a:lvl2pPr marL="457200" algn="l" defTabSz="914400" rtl="0" eaLnBrk="1" latinLnBrk="1" hangingPunct="1">
       <a:defRPr sz="1200" kern="1200">
         <a:solidFill>
           <a:schemeClr val="tx1"/>
@@ -421,7 +439,7 @@
         <a:cs typeface="+mn-cs"/>
       </a:defRPr>
     </a:lvl2pPr>
-    <a:lvl3pPr marL="914400" algn="l" defTabSz="457200" rtl="0" eaLnBrk="1" latinLnBrk="0" hangingPunct="1">
+    <a:lvl3pPr marL="914400" algn="l" defTabSz="914400" rtl="0" eaLnBrk="1" latinLnBrk="1" hangingPunct="1">
       <a:defRPr sz="1200" kern="1200">
         <a:solidFill>
           <a:schemeClr val="tx1"/>
@@ -431,7 +449,7 @@
         <a:cs typeface="+mn-cs"/>
       </a:defRPr>
     </a:lvl3pPr>
-    <a:lvl4pPr marL="1371600" algn="l" defTabSz="457200" rtl="0" eaLnBrk="1" latinLnBrk="0" hangingPunct="1">
+    <a:lvl4pPr marL="1371600" algn="l" defTabSz="914400" rtl="0" eaLnBrk="1" latinLnBrk="1" hangingPunct="1">
       <a:defRPr sz="1200" kern="1200">
         <a:solidFill>
           <a:schemeClr val="tx1"/>
@@ -441,7 +459,7 @@
         <a:cs typeface="+mn-cs"/>
       </a:defRPr>
     </a:lvl4pPr>
-    <a:lvl5pPr marL="1828800" algn="l" defTabSz="457200" rtl="0" eaLnBrk="1" latinLnBrk="0" hangingPunct="1">
+    <a:lvl5pPr marL="1828800" algn="l" defTabSz="914400" rtl="0" eaLnBrk="1" latinLnBrk="1" hangingPunct="1">
       <a:defRPr sz="1200" kern="1200">
         <a:solidFill>
           <a:schemeClr val="tx1"/>
@@ -451,7 +469,7 @@
         <a:cs typeface="+mn-cs"/>
       </a:defRPr>
     </a:lvl5pPr>
-    <a:lvl6pPr marL="2286000" algn="l" defTabSz="457200" rtl="0" eaLnBrk="1" latinLnBrk="0" hangingPunct="1">
+    <a:lvl6pPr marL="2286000" algn="l" defTabSz="914400" rtl="0" eaLnBrk="1" latinLnBrk="1" hangingPunct="1">
       <a:defRPr sz="1200" kern="1200">
         <a:solidFill>
           <a:schemeClr val="tx1"/>
@@ -461,7 +479,7 @@
         <a:cs typeface="+mn-cs"/>
       </a:defRPr>
     </a:lvl6pPr>
-    <a:lvl7pPr marL="2743200" algn="l" defTabSz="457200" rtl="0" eaLnBrk="1" latinLnBrk="0" hangingPunct="1">
+    <a:lvl7pPr marL="2743200" algn="l" defTabSz="914400" rtl="0" eaLnBrk="1" latinLnBrk="1" hangingPunct="1">
       <a:defRPr sz="1200" kern="1200">
         <a:solidFill>
           <a:schemeClr val="tx1"/>
@@ -471,7 +489,7 @@
         <a:cs typeface="+mn-cs"/>
       </a:defRPr>
     </a:lvl7pPr>
-    <a:lvl8pPr marL="3200400" algn="l" defTabSz="457200" rtl="0" eaLnBrk="1" latinLnBrk="0" hangingPunct="1">
+    <a:lvl8pPr marL="3200400" algn="l" defTabSz="914400" rtl="0" eaLnBrk="1" latinLnBrk="1" hangingPunct="1">
       <a:defRPr sz="1200" kern="1200">
         <a:solidFill>
           <a:schemeClr val="tx1"/>
@@ -481,7 +499,7 @@
         <a:cs typeface="+mn-cs"/>
       </a:defRPr>
     </a:lvl8pPr>
-    <a:lvl9pPr marL="3657600" algn="l" defTabSz="457200" rtl="0" eaLnBrk="1" latinLnBrk="0" hangingPunct="1">
+    <a:lvl9pPr marL="3657600" algn="l" defTabSz="914400" rtl="0" eaLnBrk="1" latinLnBrk="1" hangingPunct="1">
       <a:defRPr sz="1200" kern="1200">
         <a:solidFill>
           <a:schemeClr val="tx1"/>
@@ -496,7 +514,7 @@
 </file>
 
 <file path=ppt/notesSlides/notesSlide1.xml><?xml version="1.0" encoding="utf-8"?>
-<p:notes xmlns:a="http://schemas.openxmlformats.org/drawingml/2006/main" xmlns:p="http://schemas.openxmlformats.org/presentationml/2006/main" xmlns:r="http://schemas.openxmlformats.org/officeDocument/2006/relationships">
+<p:notes xmlns:a="http://schemas.openxmlformats.org/drawingml/2006/main" xmlns:r="http://schemas.openxmlformats.org/officeDocument/2006/relationships" xmlns:p="http://schemas.openxmlformats.org/presentationml/2006/main">
   <p:cSld>
     <p:spTree>
       <p:nvGrpSpPr>
@@ -516,7 +534,7 @@
         <p:nvSpPr>
           <p:cNvPr id="2" name="Slide Image Placeholder 1"/>
           <p:cNvSpPr>
-            <a:spLocks noGrp="1"/>
+            <a:spLocks noGrp="1" noRot="1" noChangeAspect="1"/>
           </p:cNvSpPr>
           <p:nvPr>
             <p:ph type="sldImg" idx="2"/>
@@ -531,7 +549,7 @@
             <a:spLocks noGrp="1"/>
           </p:cNvSpPr>
           <p:nvPr>
-            <p:ph type="body" idx="3" sz="quarter"/>
+            <p:ph type="body" sz="quarter" idx="3"/>
           </p:nvPr>
         </p:nvSpPr>
         <p:spPr/>
@@ -552,7 +570,7 @@
             <a:spLocks noGrp="1"/>
           </p:cNvSpPr>
           <p:nvPr>
-            <p:ph type="sldNum" idx="5" sz="quarter"/>
+            <p:ph type="sldNum" sz="quarter" idx="5"/>
           </p:nvPr>
         </p:nvSpPr>
         <p:spPr/>
@@ -566,7 +584,7 @@
 </file>
 
 <file path=ppt/notesSlides/notesSlide10.xml><?xml version="1.0" encoding="utf-8"?>
-<p:notes xmlns:a="http://schemas.openxmlformats.org/drawingml/2006/main" xmlns:p="http://schemas.openxmlformats.org/presentationml/2006/main" xmlns:r="http://schemas.openxmlformats.org/officeDocument/2006/relationships">
+<p:notes xmlns:a="http://schemas.openxmlformats.org/drawingml/2006/main" xmlns:r="http://schemas.openxmlformats.org/officeDocument/2006/relationships" xmlns:p="http://schemas.openxmlformats.org/presentationml/2006/main">
   <p:cSld>
     <p:spTree>
       <p:nvGrpSpPr>
@@ -586,7 +604,7 @@
         <p:nvSpPr>
           <p:cNvPr id="2" name="Slide Image Placeholder 1"/>
           <p:cNvSpPr>
-            <a:spLocks noGrp="1"/>
+            <a:spLocks noGrp="1" noRot="1" noChangeAspect="1"/>
           </p:cNvSpPr>
           <p:nvPr>
             <p:ph type="sldImg" idx="2"/>
@@ -601,7 +619,7 @@
             <a:spLocks noGrp="1"/>
           </p:cNvSpPr>
           <p:nvPr>
-            <p:ph type="body" idx="3" sz="quarter"/>
+            <p:ph type="body" sz="quarter" idx="3"/>
           </p:nvPr>
         </p:nvSpPr>
         <p:spPr/>
@@ -622,7 +640,7 @@
             <a:spLocks noGrp="1"/>
           </p:cNvSpPr>
           <p:nvPr>
-            <p:ph type="sldNum" idx="5" sz="quarter"/>
+            <p:ph type="sldNum" sz="quarter" idx="5"/>
           </p:nvPr>
         </p:nvSpPr>
         <p:spPr/>
@@ -636,7 +654,7 @@
 </file>
 
 <file path=ppt/notesSlides/notesSlide11.xml><?xml version="1.0" encoding="utf-8"?>
-<p:notes xmlns:a="http://schemas.openxmlformats.org/drawingml/2006/main" xmlns:p="http://schemas.openxmlformats.org/presentationml/2006/main" xmlns:r="http://schemas.openxmlformats.org/officeDocument/2006/relationships">
+<p:notes xmlns:a="http://schemas.openxmlformats.org/drawingml/2006/main" xmlns:r="http://schemas.openxmlformats.org/officeDocument/2006/relationships" xmlns:p="http://schemas.openxmlformats.org/presentationml/2006/main">
   <p:cSld>
     <p:spTree>
       <p:nvGrpSpPr>
@@ -656,7 +674,7 @@
         <p:nvSpPr>
           <p:cNvPr id="2" name="Slide Image Placeholder 1"/>
           <p:cNvSpPr>
-            <a:spLocks noGrp="1"/>
+            <a:spLocks noGrp="1" noRot="1" noChangeAspect="1"/>
           </p:cNvSpPr>
           <p:nvPr>
             <p:ph type="sldImg" idx="2"/>
@@ -671,7 +689,7 @@
             <a:spLocks noGrp="1"/>
           </p:cNvSpPr>
           <p:nvPr>
-            <p:ph type="body" idx="3" sz="quarter"/>
+            <p:ph type="body" sz="quarter" idx="3"/>
           </p:nvPr>
         </p:nvSpPr>
         <p:spPr/>
@@ -692,7 +710,7 @@
             <a:spLocks noGrp="1"/>
           </p:cNvSpPr>
           <p:nvPr>
-            <p:ph type="sldNum" idx="5" sz="quarter"/>
+            <p:ph type="sldNum" sz="quarter" idx="5"/>
           </p:nvPr>
         </p:nvSpPr>
         <p:spPr/>
@@ -706,7 +724,7 @@
 </file>
 
 <file path=ppt/notesSlides/notesSlide12.xml><?xml version="1.0" encoding="utf-8"?>
-<p:notes xmlns:a="http://schemas.openxmlformats.org/drawingml/2006/main" xmlns:p="http://schemas.openxmlformats.org/presentationml/2006/main" xmlns:r="http://schemas.openxmlformats.org/officeDocument/2006/relationships">
+<p:notes xmlns:a="http://schemas.openxmlformats.org/drawingml/2006/main" xmlns:r="http://schemas.openxmlformats.org/officeDocument/2006/relationships" xmlns:p="http://schemas.openxmlformats.org/presentationml/2006/main">
   <p:cSld>
     <p:spTree>
       <p:nvGrpSpPr>
@@ -726,7 +744,7 @@
         <p:nvSpPr>
           <p:cNvPr id="2" name="Slide Image Placeholder 1"/>
           <p:cNvSpPr>
-            <a:spLocks noGrp="1"/>
+            <a:spLocks noGrp="1" noRot="1" noChangeAspect="1"/>
           </p:cNvSpPr>
           <p:nvPr>
             <p:ph type="sldImg" idx="2"/>
@@ -741,7 +759,7 @@
             <a:spLocks noGrp="1"/>
           </p:cNvSpPr>
           <p:nvPr>
-            <p:ph type="body" idx="3" sz="quarter"/>
+            <p:ph type="body" sz="quarter" idx="3"/>
           </p:nvPr>
         </p:nvSpPr>
         <p:spPr/>
@@ -762,7 +780,7 @@
             <a:spLocks noGrp="1"/>
           </p:cNvSpPr>
           <p:nvPr>
-            <p:ph type="sldNum" idx="5" sz="quarter"/>
+            <p:ph type="sldNum" sz="quarter" idx="5"/>
           </p:nvPr>
         </p:nvSpPr>
         <p:spPr/>
@@ -776,7 +794,7 @@
 </file>
 
 <file path=ppt/notesSlides/notesSlide13.xml><?xml version="1.0" encoding="utf-8"?>
-<p:notes xmlns:a="http://schemas.openxmlformats.org/drawingml/2006/main" xmlns:p="http://schemas.openxmlformats.org/presentationml/2006/main" xmlns:r="http://schemas.openxmlformats.org/officeDocument/2006/relationships">
+<p:notes xmlns:a="http://schemas.openxmlformats.org/drawingml/2006/main" xmlns:r="http://schemas.openxmlformats.org/officeDocument/2006/relationships" xmlns:p="http://schemas.openxmlformats.org/presentationml/2006/main">
   <p:cSld>
     <p:spTree>
       <p:nvGrpSpPr>
@@ -796,7 +814,7 @@
         <p:nvSpPr>
           <p:cNvPr id="2" name="Slide Image Placeholder 1"/>
           <p:cNvSpPr>
-            <a:spLocks noGrp="1"/>
+            <a:spLocks noGrp="1" noRot="1" noChangeAspect="1"/>
           </p:cNvSpPr>
           <p:nvPr>
             <p:ph type="sldImg" idx="2"/>
@@ -811,7 +829,7 @@
             <a:spLocks noGrp="1"/>
           </p:cNvSpPr>
           <p:nvPr>
-            <p:ph type="body" idx="3" sz="quarter"/>
+            <p:ph type="body" sz="quarter" idx="3"/>
           </p:nvPr>
         </p:nvSpPr>
         <p:spPr/>
@@ -832,7 +850,7 @@
             <a:spLocks noGrp="1"/>
           </p:cNvSpPr>
           <p:nvPr>
-            <p:ph type="sldNum" idx="5" sz="quarter"/>
+            <p:ph type="sldNum" sz="quarter" idx="5"/>
           </p:nvPr>
         </p:nvSpPr>
         <p:spPr/>
@@ -846,7 +864,7 @@
 </file>
 
 <file path=ppt/notesSlides/notesSlide14.xml><?xml version="1.0" encoding="utf-8"?>
-<p:notes xmlns:a="http://schemas.openxmlformats.org/drawingml/2006/main" xmlns:p="http://schemas.openxmlformats.org/presentationml/2006/main" xmlns:r="http://schemas.openxmlformats.org/officeDocument/2006/relationships">
+<p:notes xmlns:a="http://schemas.openxmlformats.org/drawingml/2006/main" xmlns:r="http://schemas.openxmlformats.org/officeDocument/2006/relationships" xmlns:p="http://schemas.openxmlformats.org/presentationml/2006/main">
   <p:cSld>
     <p:spTree>
       <p:nvGrpSpPr>
@@ -866,7 +884,7 @@
         <p:nvSpPr>
           <p:cNvPr id="2" name="Slide Image Placeholder 1"/>
           <p:cNvSpPr>
-            <a:spLocks noGrp="1"/>
+            <a:spLocks noGrp="1" noRot="1" noChangeAspect="1"/>
           </p:cNvSpPr>
           <p:nvPr>
             <p:ph type="sldImg" idx="2"/>
@@ -881,7 +899,7 @@
             <a:spLocks noGrp="1"/>
           </p:cNvSpPr>
           <p:nvPr>
-            <p:ph type="body" idx="3" sz="quarter"/>
+            <p:ph type="body" sz="quarter" idx="3"/>
           </p:nvPr>
         </p:nvSpPr>
         <p:spPr/>
@@ -902,7 +920,7 @@
             <a:spLocks noGrp="1"/>
           </p:cNvSpPr>
           <p:nvPr>
-            <p:ph type="sldNum" idx="5" sz="quarter"/>
+            <p:ph type="sldNum" sz="quarter" idx="5"/>
           </p:nvPr>
         </p:nvSpPr>
         <p:spPr/>
@@ -916,7 +934,7 @@
 </file>
 
 <file path=ppt/notesSlides/notesSlide15.xml><?xml version="1.0" encoding="utf-8"?>
-<p:notes xmlns:a="http://schemas.openxmlformats.org/drawingml/2006/main" xmlns:p="http://schemas.openxmlformats.org/presentationml/2006/main" xmlns:r="http://schemas.openxmlformats.org/officeDocument/2006/relationships">
+<p:notes xmlns:a="http://schemas.openxmlformats.org/drawingml/2006/main" xmlns:r="http://schemas.openxmlformats.org/officeDocument/2006/relationships" xmlns:p="http://schemas.openxmlformats.org/presentationml/2006/main">
   <p:cSld>
     <p:spTree>
       <p:nvGrpSpPr>
@@ -936,7 +954,7 @@
         <p:nvSpPr>
           <p:cNvPr id="2" name="Slide Image Placeholder 1"/>
           <p:cNvSpPr>
-            <a:spLocks noGrp="1"/>
+            <a:spLocks noGrp="1" noRot="1" noChangeAspect="1"/>
           </p:cNvSpPr>
           <p:nvPr>
             <p:ph type="sldImg" idx="2"/>
@@ -951,7 +969,7 @@
             <a:spLocks noGrp="1"/>
           </p:cNvSpPr>
           <p:nvPr>
-            <p:ph type="body" idx="3" sz="quarter"/>
+            <p:ph type="body" sz="quarter" idx="3"/>
           </p:nvPr>
         </p:nvSpPr>
         <p:spPr/>
@@ -972,7 +990,7 @@
             <a:spLocks noGrp="1"/>
           </p:cNvSpPr>
           <p:nvPr>
-            <p:ph type="sldNum" idx="5" sz="quarter"/>
+            <p:ph type="sldNum" sz="quarter" idx="5"/>
           </p:nvPr>
         </p:nvSpPr>
         <p:spPr/>
@@ -986,7 +1004,7 @@
 </file>
 
 <file path=ppt/notesSlides/notesSlide16.xml><?xml version="1.0" encoding="utf-8"?>
-<p:notes xmlns:a="http://schemas.openxmlformats.org/drawingml/2006/main" xmlns:p="http://schemas.openxmlformats.org/presentationml/2006/main" xmlns:r="http://schemas.openxmlformats.org/officeDocument/2006/relationships">
+<p:notes xmlns:a="http://schemas.openxmlformats.org/drawingml/2006/main" xmlns:r="http://schemas.openxmlformats.org/officeDocument/2006/relationships" xmlns:p="http://schemas.openxmlformats.org/presentationml/2006/main">
   <p:cSld>
     <p:spTree>
       <p:nvGrpSpPr>
@@ -1006,7 +1024,7 @@
         <p:nvSpPr>
           <p:cNvPr id="2" name="Slide Image Placeholder 1"/>
           <p:cNvSpPr>
-            <a:spLocks noGrp="1"/>
+            <a:spLocks noGrp="1" noRot="1" noChangeAspect="1"/>
           </p:cNvSpPr>
           <p:nvPr>
             <p:ph type="sldImg" idx="2"/>
@@ -1021,7 +1039,7 @@
             <a:spLocks noGrp="1"/>
           </p:cNvSpPr>
           <p:nvPr>
-            <p:ph type="body" idx="3" sz="quarter"/>
+            <p:ph type="body" sz="quarter" idx="3"/>
           </p:nvPr>
         </p:nvSpPr>
         <p:spPr/>
@@ -1042,7 +1060,7 @@
             <a:spLocks noGrp="1"/>
           </p:cNvSpPr>
           <p:nvPr>
-            <p:ph type="sldNum" idx="5" sz="quarter"/>
+            <p:ph type="sldNum" sz="quarter" idx="5"/>
           </p:nvPr>
         </p:nvSpPr>
         <p:spPr/>
@@ -1056,7 +1074,7 @@
 </file>
 
 <file path=ppt/notesSlides/notesSlide17.xml><?xml version="1.0" encoding="utf-8"?>
-<p:notes xmlns:a="http://schemas.openxmlformats.org/drawingml/2006/main" xmlns:p="http://schemas.openxmlformats.org/presentationml/2006/main" xmlns:r="http://schemas.openxmlformats.org/officeDocument/2006/relationships">
+<p:notes xmlns:a="http://schemas.openxmlformats.org/drawingml/2006/main" xmlns:r="http://schemas.openxmlformats.org/officeDocument/2006/relationships" xmlns:p="http://schemas.openxmlformats.org/presentationml/2006/main">
   <p:cSld>
     <p:spTree>
       <p:nvGrpSpPr>
@@ -1076,7 +1094,7 @@
         <p:nvSpPr>
           <p:cNvPr id="2" name="Slide Image Placeholder 1"/>
           <p:cNvSpPr>
-            <a:spLocks noGrp="1"/>
+            <a:spLocks noGrp="1" noRot="1" noChangeAspect="1"/>
           </p:cNvSpPr>
           <p:nvPr>
             <p:ph type="sldImg" idx="2"/>
@@ -1091,7 +1109,7 @@
             <a:spLocks noGrp="1"/>
           </p:cNvSpPr>
           <p:nvPr>
-            <p:ph type="body" idx="3" sz="quarter"/>
+            <p:ph type="body" sz="quarter" idx="3"/>
           </p:nvPr>
         </p:nvSpPr>
         <p:spPr/>
@@ -1112,7 +1130,7 @@
             <a:spLocks noGrp="1"/>
           </p:cNvSpPr>
           <p:nvPr>
-            <p:ph type="sldNum" idx="5" sz="quarter"/>
+            <p:ph type="sldNum" sz="quarter" idx="5"/>
           </p:nvPr>
         </p:nvSpPr>
         <p:spPr/>
@@ -1126,7 +1144,7 @@
 </file>
 
 <file path=ppt/notesSlides/notesSlide18.xml><?xml version="1.0" encoding="utf-8"?>
-<p:notes xmlns:a="http://schemas.openxmlformats.org/drawingml/2006/main" xmlns:p="http://schemas.openxmlformats.org/presentationml/2006/main" xmlns:r="http://schemas.openxmlformats.org/officeDocument/2006/relationships">
+<p:notes xmlns:a="http://schemas.openxmlformats.org/drawingml/2006/main" xmlns:r="http://schemas.openxmlformats.org/officeDocument/2006/relationships" xmlns:p="http://schemas.openxmlformats.org/presentationml/2006/main">
   <p:cSld>
     <p:spTree>
       <p:nvGrpSpPr>
@@ -1146,7 +1164,7 @@
         <p:nvSpPr>
           <p:cNvPr id="2" name="Slide Image Placeholder 1"/>
           <p:cNvSpPr>
-            <a:spLocks noGrp="1"/>
+            <a:spLocks noGrp="1" noRot="1" noChangeAspect="1"/>
           </p:cNvSpPr>
           <p:nvPr>
             <p:ph type="sldImg" idx="2"/>
@@ -1161,7 +1179,7 @@
             <a:spLocks noGrp="1"/>
           </p:cNvSpPr>
           <p:nvPr>
-            <p:ph type="body" idx="3" sz="quarter"/>
+            <p:ph type="body" sz="quarter" idx="3"/>
           </p:nvPr>
         </p:nvSpPr>
         <p:spPr/>
@@ -1182,7 +1200,7 @@
             <a:spLocks noGrp="1"/>
           </p:cNvSpPr>
           <p:nvPr>
-            <p:ph type="sldNum" idx="5" sz="quarter"/>
+            <p:ph type="sldNum" sz="quarter" idx="5"/>
           </p:nvPr>
         </p:nvSpPr>
         <p:spPr/>
@@ -1196,7 +1214,7 @@
 </file>
 
 <file path=ppt/notesSlides/notesSlide19.xml><?xml version="1.0" encoding="utf-8"?>
-<p:notes xmlns:a="http://schemas.openxmlformats.org/drawingml/2006/main" xmlns:p="http://schemas.openxmlformats.org/presentationml/2006/main" xmlns:r="http://schemas.openxmlformats.org/officeDocument/2006/relationships">
+<p:notes xmlns:a="http://schemas.openxmlformats.org/drawingml/2006/main" xmlns:r="http://schemas.openxmlformats.org/officeDocument/2006/relationships" xmlns:p="http://schemas.openxmlformats.org/presentationml/2006/main">
   <p:cSld>
     <p:spTree>
       <p:nvGrpSpPr>
@@ -1216,7 +1234,7 @@
         <p:nvSpPr>
           <p:cNvPr id="2" name="Slide Image Placeholder 1"/>
           <p:cNvSpPr>
-            <a:spLocks noGrp="1"/>
+            <a:spLocks noGrp="1" noRot="1" noChangeAspect="1"/>
           </p:cNvSpPr>
           <p:nvPr>
             <p:ph type="sldImg" idx="2"/>
@@ -1231,7 +1249,7 @@
             <a:spLocks noGrp="1"/>
           </p:cNvSpPr>
           <p:nvPr>
-            <p:ph type="body" idx="3" sz="quarter"/>
+            <p:ph type="body" sz="quarter" idx="3"/>
           </p:nvPr>
         </p:nvSpPr>
         <p:spPr/>
@@ -1252,7 +1270,7 @@
             <a:spLocks noGrp="1"/>
           </p:cNvSpPr>
           <p:nvPr>
-            <p:ph type="sldNum" idx="5" sz="quarter"/>
+            <p:ph type="sldNum" sz="quarter" idx="5"/>
           </p:nvPr>
         </p:nvSpPr>
         <p:spPr/>
@@ -1266,7 +1284,7 @@
 </file>
 
 <file path=ppt/notesSlides/notesSlide2.xml><?xml version="1.0" encoding="utf-8"?>
-<p:notes xmlns:a="http://schemas.openxmlformats.org/drawingml/2006/main" xmlns:p="http://schemas.openxmlformats.org/presentationml/2006/main" xmlns:r="http://schemas.openxmlformats.org/officeDocument/2006/relationships">
+<p:notes xmlns:a="http://schemas.openxmlformats.org/drawingml/2006/main" xmlns:r="http://schemas.openxmlformats.org/officeDocument/2006/relationships" xmlns:p="http://schemas.openxmlformats.org/presentationml/2006/main">
   <p:cSld>
     <p:spTree>
       <p:nvGrpSpPr>
@@ -1286,7 +1304,7 @@
         <p:nvSpPr>
           <p:cNvPr id="2" name="Slide Image Placeholder 1"/>
           <p:cNvSpPr>
-            <a:spLocks noGrp="1"/>
+            <a:spLocks noGrp="1" noRot="1" noChangeAspect="1"/>
           </p:cNvSpPr>
           <p:nvPr>
             <p:ph type="sldImg" idx="2"/>
@@ -1301,7 +1319,7 @@
             <a:spLocks noGrp="1"/>
           </p:cNvSpPr>
           <p:nvPr>
-            <p:ph type="body" idx="3" sz="quarter"/>
+            <p:ph type="body" sz="quarter" idx="3"/>
           </p:nvPr>
         </p:nvSpPr>
         <p:spPr/>
@@ -1322,7 +1340,7 @@
             <a:spLocks noGrp="1"/>
           </p:cNvSpPr>
           <p:nvPr>
-            <p:ph type="sldNum" idx="5" sz="quarter"/>
+            <p:ph type="sldNum" sz="quarter" idx="5"/>
           </p:nvPr>
         </p:nvSpPr>
         <p:spPr/>
@@ -1336,7 +1354,7 @@
 </file>
 
 <file path=ppt/notesSlides/notesSlide20.xml><?xml version="1.0" encoding="utf-8"?>
-<p:notes xmlns:a="http://schemas.openxmlformats.org/drawingml/2006/main" xmlns:p="http://schemas.openxmlformats.org/presentationml/2006/main" xmlns:r="http://schemas.openxmlformats.org/officeDocument/2006/relationships">
+<p:notes xmlns:a="http://schemas.openxmlformats.org/drawingml/2006/main" xmlns:r="http://schemas.openxmlformats.org/officeDocument/2006/relationships" xmlns:p="http://schemas.openxmlformats.org/presentationml/2006/main">
   <p:cSld>
     <p:spTree>
       <p:nvGrpSpPr>
@@ -1356,7 +1374,7 @@
         <p:nvSpPr>
           <p:cNvPr id="2" name="Slide Image Placeholder 1"/>
           <p:cNvSpPr>
-            <a:spLocks noGrp="1"/>
+            <a:spLocks noGrp="1" noRot="1" noChangeAspect="1"/>
           </p:cNvSpPr>
           <p:nvPr>
             <p:ph type="sldImg" idx="2"/>
@@ -1371,7 +1389,7 @@
             <a:spLocks noGrp="1"/>
           </p:cNvSpPr>
           <p:nvPr>
-            <p:ph type="body" idx="3" sz="quarter"/>
+            <p:ph type="body" sz="quarter" idx="3"/>
           </p:nvPr>
         </p:nvSpPr>
         <p:spPr/>
@@ -1392,7 +1410,7 @@
             <a:spLocks noGrp="1"/>
           </p:cNvSpPr>
           <p:nvPr>
-            <p:ph type="sldNum" idx="5" sz="quarter"/>
+            <p:ph type="sldNum" sz="quarter" idx="5"/>
           </p:nvPr>
         </p:nvSpPr>
         <p:spPr/>
@@ -1406,7 +1424,7 @@
 </file>
 
 <file path=ppt/notesSlides/notesSlide21.xml><?xml version="1.0" encoding="utf-8"?>
-<p:notes xmlns:a="http://schemas.openxmlformats.org/drawingml/2006/main" xmlns:p="http://schemas.openxmlformats.org/presentationml/2006/main" xmlns:r="http://schemas.openxmlformats.org/officeDocument/2006/relationships">
+<p:notes xmlns:a="http://schemas.openxmlformats.org/drawingml/2006/main" xmlns:r="http://schemas.openxmlformats.org/officeDocument/2006/relationships" xmlns:p="http://schemas.openxmlformats.org/presentationml/2006/main">
   <p:cSld>
     <p:spTree>
       <p:nvGrpSpPr>
@@ -1426,7 +1444,7 @@
         <p:nvSpPr>
           <p:cNvPr id="2" name="Slide Image Placeholder 1"/>
           <p:cNvSpPr>
-            <a:spLocks noGrp="1"/>
+            <a:spLocks noGrp="1" noRot="1" noChangeAspect="1"/>
           </p:cNvSpPr>
           <p:nvPr>
             <p:ph type="sldImg" idx="2"/>
@@ -1441,7 +1459,7 @@
             <a:spLocks noGrp="1"/>
           </p:cNvSpPr>
           <p:nvPr>
-            <p:ph type="body" idx="3" sz="quarter"/>
+            <p:ph type="body" sz="quarter" idx="3"/>
           </p:nvPr>
         </p:nvSpPr>
         <p:spPr/>
@@ -1462,7 +1480,7 @@
             <a:spLocks noGrp="1"/>
           </p:cNvSpPr>
           <p:nvPr>
-            <p:ph type="sldNum" idx="5" sz="quarter"/>
+            <p:ph type="sldNum" sz="quarter" idx="5"/>
           </p:nvPr>
         </p:nvSpPr>
         <p:spPr/>
@@ -1476,7 +1494,7 @@
 </file>
 
 <file path=ppt/notesSlides/notesSlide22.xml><?xml version="1.0" encoding="utf-8"?>
-<p:notes xmlns:a="http://schemas.openxmlformats.org/drawingml/2006/main" xmlns:p="http://schemas.openxmlformats.org/presentationml/2006/main" xmlns:r="http://schemas.openxmlformats.org/officeDocument/2006/relationships">
+<p:notes xmlns:a="http://schemas.openxmlformats.org/drawingml/2006/main" xmlns:r="http://schemas.openxmlformats.org/officeDocument/2006/relationships" xmlns:p="http://schemas.openxmlformats.org/presentationml/2006/main">
   <p:cSld>
     <p:spTree>
       <p:nvGrpSpPr>
@@ -1496,7 +1514,7 @@
         <p:nvSpPr>
           <p:cNvPr id="2" name="Slide Image Placeholder 1"/>
           <p:cNvSpPr>
-            <a:spLocks noGrp="1"/>
+            <a:spLocks noGrp="1" noRot="1" noChangeAspect="1"/>
           </p:cNvSpPr>
           <p:nvPr>
             <p:ph type="sldImg" idx="2"/>
@@ -1511,7 +1529,7 @@
             <a:spLocks noGrp="1"/>
           </p:cNvSpPr>
           <p:nvPr>
-            <p:ph type="body" idx="3" sz="quarter"/>
+            <p:ph type="body" sz="quarter" idx="3"/>
           </p:nvPr>
         </p:nvSpPr>
         <p:spPr/>
@@ -1532,7 +1550,7 @@
             <a:spLocks noGrp="1"/>
           </p:cNvSpPr>
           <p:nvPr>
-            <p:ph type="sldNum" idx="5" sz="quarter"/>
+            <p:ph type="sldNum" sz="quarter" idx="5"/>
           </p:nvPr>
         </p:nvSpPr>
         <p:spPr/>
@@ -1546,7 +1564,7 @@
 </file>
 
 <file path=ppt/notesSlides/notesSlide23.xml><?xml version="1.0" encoding="utf-8"?>
-<p:notes xmlns:a="http://schemas.openxmlformats.org/drawingml/2006/main" xmlns:p="http://schemas.openxmlformats.org/presentationml/2006/main" xmlns:r="http://schemas.openxmlformats.org/officeDocument/2006/relationships">
+<p:notes xmlns:a="http://schemas.openxmlformats.org/drawingml/2006/main" xmlns:r="http://schemas.openxmlformats.org/officeDocument/2006/relationships" xmlns:p="http://schemas.openxmlformats.org/presentationml/2006/main">
   <p:cSld>
     <p:spTree>
       <p:nvGrpSpPr>
@@ -1566,7 +1584,7 @@
         <p:nvSpPr>
           <p:cNvPr id="2" name="Slide Image Placeholder 1"/>
           <p:cNvSpPr>
-            <a:spLocks noGrp="1"/>
+            <a:spLocks noGrp="1" noRot="1" noChangeAspect="1"/>
           </p:cNvSpPr>
           <p:nvPr>
             <p:ph type="sldImg" idx="2"/>
@@ -1581,7 +1599,7 @@
             <a:spLocks noGrp="1"/>
           </p:cNvSpPr>
           <p:nvPr>
-            <p:ph type="body" idx="3" sz="quarter"/>
+            <p:ph type="body" sz="quarter" idx="3"/>
           </p:nvPr>
         </p:nvSpPr>
         <p:spPr/>
@@ -1602,7 +1620,7 @@
             <a:spLocks noGrp="1"/>
           </p:cNvSpPr>
           <p:nvPr>
-            <p:ph type="sldNum" idx="5" sz="quarter"/>
+            <p:ph type="sldNum" sz="quarter" idx="5"/>
           </p:nvPr>
         </p:nvSpPr>
         <p:spPr/>
@@ -1616,7 +1634,7 @@
 </file>
 
 <file path=ppt/notesSlides/notesSlide24.xml><?xml version="1.0" encoding="utf-8"?>
-<p:notes xmlns:a="http://schemas.openxmlformats.org/drawingml/2006/main" xmlns:p="http://schemas.openxmlformats.org/presentationml/2006/main" xmlns:r="http://schemas.openxmlformats.org/officeDocument/2006/relationships">
+<p:notes xmlns:a="http://schemas.openxmlformats.org/drawingml/2006/main" xmlns:r="http://schemas.openxmlformats.org/officeDocument/2006/relationships" xmlns:p="http://schemas.openxmlformats.org/presentationml/2006/main">
   <p:cSld>
     <p:spTree>
       <p:nvGrpSpPr>
@@ -1636,7 +1654,7 @@
         <p:nvSpPr>
           <p:cNvPr id="2" name="Slide Image Placeholder 1"/>
           <p:cNvSpPr>
-            <a:spLocks noGrp="1"/>
+            <a:spLocks noGrp="1" noRot="1" noChangeAspect="1"/>
           </p:cNvSpPr>
           <p:nvPr>
             <p:ph type="sldImg" idx="2"/>
@@ -1651,7 +1669,7 @@
             <a:spLocks noGrp="1"/>
           </p:cNvSpPr>
           <p:nvPr>
-            <p:ph type="body" idx="3" sz="quarter"/>
+            <p:ph type="body" sz="quarter" idx="3"/>
           </p:nvPr>
         </p:nvSpPr>
         <p:spPr/>
@@ -1672,7 +1690,7 @@
             <a:spLocks noGrp="1"/>
           </p:cNvSpPr>
           <p:nvPr>
-            <p:ph type="sldNum" idx="5" sz="quarter"/>
+            <p:ph type="sldNum" sz="quarter" idx="5"/>
           </p:nvPr>
         </p:nvSpPr>
         <p:spPr/>
@@ -1686,7 +1704,7 @@
 </file>
 
 <file path=ppt/notesSlides/notesSlide25.xml><?xml version="1.0" encoding="utf-8"?>
-<p:notes xmlns:a="http://schemas.openxmlformats.org/drawingml/2006/main" xmlns:p="http://schemas.openxmlformats.org/presentationml/2006/main" xmlns:r="http://schemas.openxmlformats.org/officeDocument/2006/relationships">
+<p:notes xmlns:a="http://schemas.openxmlformats.org/drawingml/2006/main" xmlns:r="http://schemas.openxmlformats.org/officeDocument/2006/relationships" xmlns:p="http://schemas.openxmlformats.org/presentationml/2006/main">
   <p:cSld>
     <p:spTree>
       <p:nvGrpSpPr>
@@ -1706,7 +1724,7 @@
         <p:nvSpPr>
           <p:cNvPr id="2" name="Slide Image Placeholder 1"/>
           <p:cNvSpPr>
-            <a:spLocks noGrp="1"/>
+            <a:spLocks noGrp="1" noRot="1" noChangeAspect="1"/>
           </p:cNvSpPr>
           <p:nvPr>
             <p:ph type="sldImg" idx="2"/>
@@ -1721,7 +1739,7 @@
             <a:spLocks noGrp="1"/>
           </p:cNvSpPr>
           <p:nvPr>
-            <p:ph type="body" idx="3" sz="quarter"/>
+            <p:ph type="body" sz="quarter" idx="3"/>
           </p:nvPr>
         </p:nvSpPr>
         <p:spPr/>
@@ -1742,7 +1760,7 @@
             <a:spLocks noGrp="1"/>
           </p:cNvSpPr>
           <p:nvPr>
-            <p:ph type="sldNum" idx="5" sz="quarter"/>
+            <p:ph type="sldNum" sz="quarter" idx="5"/>
           </p:nvPr>
         </p:nvSpPr>
         <p:spPr/>
@@ -1756,7 +1774,7 @@
 </file>
 
 <file path=ppt/notesSlides/notesSlide26.xml><?xml version="1.0" encoding="utf-8"?>
-<p:notes xmlns:a="http://schemas.openxmlformats.org/drawingml/2006/main" xmlns:p="http://schemas.openxmlformats.org/presentationml/2006/main" xmlns:r="http://schemas.openxmlformats.org/officeDocument/2006/relationships">
+<p:notes xmlns:a="http://schemas.openxmlformats.org/drawingml/2006/main" xmlns:r="http://schemas.openxmlformats.org/officeDocument/2006/relationships" xmlns:p="http://schemas.openxmlformats.org/presentationml/2006/main">
   <p:cSld>
     <p:spTree>
       <p:nvGrpSpPr>
@@ -1776,7 +1794,7 @@
         <p:nvSpPr>
           <p:cNvPr id="2" name="Slide Image Placeholder 1"/>
           <p:cNvSpPr>
-            <a:spLocks noGrp="1"/>
+            <a:spLocks noGrp="1" noRot="1" noChangeAspect="1"/>
           </p:cNvSpPr>
           <p:nvPr>
             <p:ph type="sldImg" idx="2"/>
@@ -1791,7 +1809,7 @@
             <a:spLocks noGrp="1"/>
           </p:cNvSpPr>
           <p:nvPr>
-            <p:ph type="body" idx="3" sz="quarter"/>
+            <p:ph type="body" sz="quarter" idx="3"/>
           </p:nvPr>
         </p:nvSpPr>
         <p:spPr/>
@@ -1812,7 +1830,7 @@
             <a:spLocks noGrp="1"/>
           </p:cNvSpPr>
           <p:nvPr>
-            <p:ph type="sldNum" idx="5" sz="quarter"/>
+            <p:ph type="sldNum" sz="quarter" idx="5"/>
           </p:nvPr>
         </p:nvSpPr>
         <p:spPr/>
@@ -1826,7 +1844,7 @@
 </file>
 
 <file path=ppt/notesSlides/notesSlide27.xml><?xml version="1.0" encoding="utf-8"?>
-<p:notes xmlns:a="http://schemas.openxmlformats.org/drawingml/2006/main" xmlns:p="http://schemas.openxmlformats.org/presentationml/2006/main" xmlns:r="http://schemas.openxmlformats.org/officeDocument/2006/relationships">
+<p:notes xmlns:a="http://schemas.openxmlformats.org/drawingml/2006/main" xmlns:r="http://schemas.openxmlformats.org/officeDocument/2006/relationships" xmlns:p="http://schemas.openxmlformats.org/presentationml/2006/main">
   <p:cSld>
     <p:spTree>
       <p:nvGrpSpPr>
@@ -1846,7 +1864,7 @@
         <p:nvSpPr>
           <p:cNvPr id="2" name="Slide Image Placeholder 1"/>
           <p:cNvSpPr>
-            <a:spLocks noGrp="1"/>
+            <a:spLocks noGrp="1" noRot="1" noChangeAspect="1"/>
           </p:cNvSpPr>
           <p:nvPr>
             <p:ph type="sldImg" idx="2"/>
@@ -1861,7 +1879,7 @@
             <a:spLocks noGrp="1"/>
           </p:cNvSpPr>
           <p:nvPr>
-            <p:ph type="body" idx="3" sz="quarter"/>
+            <p:ph type="body" sz="quarter" idx="3"/>
           </p:nvPr>
         </p:nvSpPr>
         <p:spPr/>
@@ -1882,7 +1900,7 @@
             <a:spLocks noGrp="1"/>
           </p:cNvSpPr>
           <p:nvPr>
-            <p:ph type="sldNum" idx="5" sz="quarter"/>
+            <p:ph type="sldNum" sz="quarter" idx="5"/>
           </p:nvPr>
         </p:nvSpPr>
         <p:spPr/>
@@ -1896,7 +1914,7 @@
 </file>
 
 <file path=ppt/notesSlides/notesSlide28.xml><?xml version="1.0" encoding="utf-8"?>
-<p:notes xmlns:a="http://schemas.openxmlformats.org/drawingml/2006/main" xmlns:p="http://schemas.openxmlformats.org/presentationml/2006/main" xmlns:r="http://schemas.openxmlformats.org/officeDocument/2006/relationships">
+<p:notes xmlns:a="http://schemas.openxmlformats.org/drawingml/2006/main" xmlns:r="http://schemas.openxmlformats.org/officeDocument/2006/relationships" xmlns:p="http://schemas.openxmlformats.org/presentationml/2006/main">
   <p:cSld>
     <p:spTree>
       <p:nvGrpSpPr>
@@ -1916,7 +1934,7 @@
         <p:nvSpPr>
           <p:cNvPr id="2" name="Slide Image Placeholder 1"/>
           <p:cNvSpPr>
-            <a:spLocks noGrp="1"/>
+            <a:spLocks noGrp="1" noRot="1" noChangeAspect="1"/>
           </p:cNvSpPr>
           <p:nvPr>
             <p:ph type="sldImg" idx="2"/>
@@ -1931,7 +1949,7 @@
             <a:spLocks noGrp="1"/>
           </p:cNvSpPr>
           <p:nvPr>
-            <p:ph type="body" idx="3" sz="quarter"/>
+            <p:ph type="body" sz="quarter" idx="3"/>
           </p:nvPr>
         </p:nvSpPr>
         <p:spPr/>
@@ -1952,7 +1970,7 @@
             <a:spLocks noGrp="1"/>
           </p:cNvSpPr>
           <p:nvPr>
-            <p:ph type="sldNum" idx="5" sz="quarter"/>
+            <p:ph type="sldNum" sz="quarter" idx="5"/>
           </p:nvPr>
         </p:nvSpPr>
         <p:spPr/>
@@ -1966,7 +1984,7 @@
 </file>
 
 <file path=ppt/notesSlides/notesSlide29.xml><?xml version="1.0" encoding="utf-8"?>
-<p:notes xmlns:a="http://schemas.openxmlformats.org/drawingml/2006/main" xmlns:p="http://schemas.openxmlformats.org/presentationml/2006/main" xmlns:r="http://schemas.openxmlformats.org/officeDocument/2006/relationships">
+<p:notes xmlns:a="http://schemas.openxmlformats.org/drawingml/2006/main" xmlns:r="http://schemas.openxmlformats.org/officeDocument/2006/relationships" xmlns:p="http://schemas.openxmlformats.org/presentationml/2006/main">
   <p:cSld>
     <p:spTree>
       <p:nvGrpSpPr>
@@ -1986,7 +2004,7 @@
         <p:nvSpPr>
           <p:cNvPr id="2" name="Slide Image Placeholder 1"/>
           <p:cNvSpPr>
-            <a:spLocks noGrp="1"/>
+            <a:spLocks noGrp="1" noRot="1" noChangeAspect="1"/>
           </p:cNvSpPr>
           <p:nvPr>
             <p:ph type="sldImg" idx="2"/>
@@ -2001,7 +2019,7 @@
             <a:spLocks noGrp="1"/>
           </p:cNvSpPr>
           <p:nvPr>
-            <p:ph type="body" idx="3" sz="quarter"/>
+            <p:ph type="body" sz="quarter" idx="3"/>
           </p:nvPr>
         </p:nvSpPr>
         <p:spPr/>
@@ -2022,7 +2040,7 @@
             <a:spLocks noGrp="1"/>
           </p:cNvSpPr>
           <p:nvPr>
-            <p:ph type="sldNum" idx="5" sz="quarter"/>
+            <p:ph type="sldNum" sz="quarter" idx="5"/>
           </p:nvPr>
         </p:nvSpPr>
         <p:spPr/>
@@ -2036,7 +2054,7 @@
 </file>
 
 <file path=ppt/notesSlides/notesSlide3.xml><?xml version="1.0" encoding="utf-8"?>
-<p:notes xmlns:a="http://schemas.openxmlformats.org/drawingml/2006/main" xmlns:p="http://schemas.openxmlformats.org/presentationml/2006/main" xmlns:r="http://schemas.openxmlformats.org/officeDocument/2006/relationships">
+<p:notes xmlns:a="http://schemas.openxmlformats.org/drawingml/2006/main" xmlns:r="http://schemas.openxmlformats.org/officeDocument/2006/relationships" xmlns:p="http://schemas.openxmlformats.org/presentationml/2006/main">
   <p:cSld>
     <p:spTree>
       <p:nvGrpSpPr>
@@ -2056,7 +2074,7 @@
         <p:nvSpPr>
           <p:cNvPr id="2" name="Slide Image Placeholder 1"/>
           <p:cNvSpPr>
-            <a:spLocks noGrp="1"/>
+            <a:spLocks noGrp="1" noRot="1" noChangeAspect="1"/>
           </p:cNvSpPr>
           <p:nvPr>
             <p:ph type="sldImg" idx="2"/>
@@ -2071,7 +2089,7 @@
             <a:spLocks noGrp="1"/>
           </p:cNvSpPr>
           <p:nvPr>
-            <p:ph type="body" idx="3" sz="quarter"/>
+            <p:ph type="body" sz="quarter" idx="3"/>
           </p:nvPr>
         </p:nvSpPr>
         <p:spPr/>
@@ -2092,7 +2110,7 @@
             <a:spLocks noGrp="1"/>
           </p:cNvSpPr>
           <p:nvPr>
-            <p:ph type="sldNum" idx="5" sz="quarter"/>
+            <p:ph type="sldNum" sz="quarter" idx="5"/>
           </p:nvPr>
         </p:nvSpPr>
         <p:spPr/>
@@ -2106,7 +2124,7 @@
 </file>
 
 <file path=ppt/notesSlides/notesSlide4.xml><?xml version="1.0" encoding="utf-8"?>
-<p:notes xmlns:a="http://schemas.openxmlformats.org/drawingml/2006/main" xmlns:p="http://schemas.openxmlformats.org/presentationml/2006/main" xmlns:r="http://schemas.openxmlformats.org/officeDocument/2006/relationships">
+<p:notes xmlns:a="http://schemas.openxmlformats.org/drawingml/2006/main" xmlns:r="http://schemas.openxmlformats.org/officeDocument/2006/relationships" xmlns:p="http://schemas.openxmlformats.org/presentationml/2006/main">
   <p:cSld>
     <p:spTree>
       <p:nvGrpSpPr>
@@ -2126,7 +2144,7 @@
         <p:nvSpPr>
           <p:cNvPr id="2" name="Slide Image Placeholder 1"/>
           <p:cNvSpPr>
-            <a:spLocks noGrp="1"/>
+            <a:spLocks noGrp="1" noRot="1" noChangeAspect="1"/>
           </p:cNvSpPr>
           <p:nvPr>
             <p:ph type="sldImg" idx="2"/>
@@ -2141,7 +2159,7 @@
             <a:spLocks noGrp="1"/>
           </p:cNvSpPr>
           <p:nvPr>
-            <p:ph type="body" idx="3" sz="quarter"/>
+            <p:ph type="body" sz="quarter" idx="3"/>
           </p:nvPr>
         </p:nvSpPr>
         <p:spPr/>
@@ -2162,7 +2180,7 @@
             <a:spLocks noGrp="1"/>
           </p:cNvSpPr>
           <p:nvPr>
-            <p:ph type="sldNum" idx="5" sz="quarter"/>
+            <p:ph type="sldNum" sz="quarter" idx="5"/>
           </p:nvPr>
         </p:nvSpPr>
         <p:spPr/>
@@ -2176,7 +2194,7 @@
 </file>
 
 <file path=ppt/notesSlides/notesSlide5.xml><?xml version="1.0" encoding="utf-8"?>
-<p:notes xmlns:a="http://schemas.openxmlformats.org/drawingml/2006/main" xmlns:p="http://schemas.openxmlformats.org/presentationml/2006/main" xmlns:r="http://schemas.openxmlformats.org/officeDocument/2006/relationships">
+<p:notes xmlns:a="http://schemas.openxmlformats.org/drawingml/2006/main" xmlns:r="http://schemas.openxmlformats.org/officeDocument/2006/relationships" xmlns:p="http://schemas.openxmlformats.org/presentationml/2006/main">
   <p:cSld>
     <p:spTree>
       <p:nvGrpSpPr>
@@ -2196,7 +2214,7 @@
         <p:nvSpPr>
           <p:cNvPr id="2" name="Slide Image Placeholder 1"/>
           <p:cNvSpPr>
-            <a:spLocks noGrp="1"/>
+            <a:spLocks noGrp="1" noRot="1" noChangeAspect="1"/>
           </p:cNvSpPr>
           <p:nvPr>
             <p:ph type="sldImg" idx="2"/>
@@ -2211,7 +2229,7 @@
             <a:spLocks noGrp="1"/>
           </p:cNvSpPr>
           <p:nvPr>
-            <p:ph type="body" idx="3" sz="quarter"/>
+            <p:ph type="body" sz="quarter" idx="3"/>
           </p:nvPr>
         </p:nvSpPr>
         <p:spPr/>
@@ -2232,7 +2250,7 @@
             <a:spLocks noGrp="1"/>
           </p:cNvSpPr>
           <p:nvPr>
-            <p:ph type="sldNum" idx="5" sz="quarter"/>
+            <p:ph type="sldNum" sz="quarter" idx="5"/>
           </p:nvPr>
         </p:nvSpPr>
         <p:spPr/>
@@ -2246,7 +2264,7 @@
 </file>
 
 <file path=ppt/notesSlides/notesSlide6.xml><?xml version="1.0" encoding="utf-8"?>
-<p:notes xmlns:a="http://schemas.openxmlformats.org/drawingml/2006/main" xmlns:p="http://schemas.openxmlformats.org/presentationml/2006/main" xmlns:r="http://schemas.openxmlformats.org/officeDocument/2006/relationships">
+<p:notes xmlns:a="http://schemas.openxmlformats.org/drawingml/2006/main" xmlns:r="http://schemas.openxmlformats.org/officeDocument/2006/relationships" xmlns:p="http://schemas.openxmlformats.org/presentationml/2006/main">
   <p:cSld>
     <p:spTree>
       <p:nvGrpSpPr>
@@ -2266,7 +2284,7 @@
         <p:nvSpPr>
           <p:cNvPr id="2" name="Slide Image Placeholder 1"/>
           <p:cNvSpPr>
-            <a:spLocks noGrp="1"/>
+            <a:spLocks noGrp="1" noRot="1" noChangeAspect="1"/>
           </p:cNvSpPr>
           <p:nvPr>
             <p:ph type="sldImg" idx="2"/>
@@ -2281,7 +2299,7 @@
             <a:spLocks noGrp="1"/>
           </p:cNvSpPr>
           <p:nvPr>
-            <p:ph type="body" idx="3" sz="quarter"/>
+            <p:ph type="body" sz="quarter" idx="3"/>
           </p:nvPr>
         </p:nvSpPr>
         <p:spPr/>
@@ -2302,7 +2320,7 @@
             <a:spLocks noGrp="1"/>
           </p:cNvSpPr>
           <p:nvPr>
-            <p:ph type="sldNum" idx="5" sz="quarter"/>
+            <p:ph type="sldNum" sz="quarter" idx="5"/>
           </p:nvPr>
         </p:nvSpPr>
         <p:spPr/>
@@ -2316,7 +2334,7 @@
 </file>
 
 <file path=ppt/notesSlides/notesSlide7.xml><?xml version="1.0" encoding="utf-8"?>
-<p:notes xmlns:a="http://schemas.openxmlformats.org/drawingml/2006/main" xmlns:p="http://schemas.openxmlformats.org/presentationml/2006/main" xmlns:r="http://schemas.openxmlformats.org/officeDocument/2006/relationships">
+<p:notes xmlns:a="http://schemas.openxmlformats.org/drawingml/2006/main" xmlns:r="http://schemas.openxmlformats.org/officeDocument/2006/relationships" xmlns:p="http://schemas.openxmlformats.org/presentationml/2006/main">
   <p:cSld>
     <p:spTree>
       <p:nvGrpSpPr>
@@ -2336,7 +2354,7 @@
         <p:nvSpPr>
           <p:cNvPr id="2" name="Slide Image Placeholder 1"/>
           <p:cNvSpPr>
-            <a:spLocks noGrp="1"/>
+            <a:spLocks noGrp="1" noRot="1" noChangeAspect="1"/>
           </p:cNvSpPr>
           <p:nvPr>
             <p:ph type="sldImg" idx="2"/>
@@ -2351,7 +2369,7 @@
             <a:spLocks noGrp="1"/>
           </p:cNvSpPr>
           <p:nvPr>
-            <p:ph type="body" idx="3" sz="quarter"/>
+            <p:ph type="body" sz="quarter" idx="3"/>
           </p:nvPr>
         </p:nvSpPr>
         <p:spPr/>
@@ -2372,7 +2390,7 @@
             <a:spLocks noGrp="1"/>
           </p:cNvSpPr>
           <p:nvPr>
-            <p:ph type="sldNum" idx="5" sz="quarter"/>
+            <p:ph type="sldNum" sz="quarter" idx="5"/>
           </p:nvPr>
         </p:nvSpPr>
         <p:spPr/>
@@ -2386,7 +2404,7 @@
 </file>
 
 <file path=ppt/notesSlides/notesSlide8.xml><?xml version="1.0" encoding="utf-8"?>
-<p:notes xmlns:a="http://schemas.openxmlformats.org/drawingml/2006/main" xmlns:p="http://schemas.openxmlformats.org/presentationml/2006/main" xmlns:r="http://schemas.openxmlformats.org/officeDocument/2006/relationships">
+<p:notes xmlns:a="http://schemas.openxmlformats.org/drawingml/2006/main" xmlns:r="http://schemas.openxmlformats.org/officeDocument/2006/relationships" xmlns:p="http://schemas.openxmlformats.org/presentationml/2006/main">
   <p:cSld>
     <p:spTree>
       <p:nvGrpSpPr>
@@ -2406,7 +2424,7 @@
         <p:nvSpPr>
           <p:cNvPr id="2" name="Slide Image Placeholder 1"/>
           <p:cNvSpPr>
-            <a:spLocks noGrp="1"/>
+            <a:spLocks noGrp="1" noRot="1" noChangeAspect="1"/>
           </p:cNvSpPr>
           <p:nvPr>
             <p:ph type="sldImg" idx="2"/>
@@ -2421,7 +2439,7 @@
             <a:spLocks noGrp="1"/>
           </p:cNvSpPr>
           <p:nvPr>
-            <p:ph type="body" idx="3" sz="quarter"/>
+            <p:ph type="body" sz="quarter" idx="3"/>
           </p:nvPr>
         </p:nvSpPr>
         <p:spPr/>
@@ -2442,7 +2460,7 @@
             <a:spLocks noGrp="1"/>
           </p:cNvSpPr>
           <p:nvPr>
-            <p:ph type="sldNum" idx="5" sz="quarter"/>
+            <p:ph type="sldNum" sz="quarter" idx="5"/>
           </p:nvPr>
         </p:nvSpPr>
         <p:spPr/>
@@ -2456,7 +2474,7 @@
 </file>
 
 <file path=ppt/notesSlides/notesSlide9.xml><?xml version="1.0" encoding="utf-8"?>
-<p:notes xmlns:a="http://schemas.openxmlformats.org/drawingml/2006/main" xmlns:p="http://schemas.openxmlformats.org/presentationml/2006/main" xmlns:r="http://schemas.openxmlformats.org/officeDocument/2006/relationships">
+<p:notes xmlns:a="http://schemas.openxmlformats.org/drawingml/2006/main" xmlns:r="http://schemas.openxmlformats.org/officeDocument/2006/relationships" xmlns:p="http://schemas.openxmlformats.org/presentationml/2006/main">
   <p:cSld>
     <p:spTree>
       <p:nvGrpSpPr>
@@ -2476,7 +2494,7 @@
         <p:nvSpPr>
           <p:cNvPr id="2" name="Slide Image Placeholder 1"/>
           <p:cNvSpPr>
-            <a:spLocks noGrp="1"/>
+            <a:spLocks noGrp="1" noRot="1" noChangeAspect="1"/>
           </p:cNvSpPr>
           <p:nvPr>
             <p:ph type="sldImg" idx="2"/>
@@ -2491,7 +2509,7 @@
             <a:spLocks noGrp="1"/>
           </p:cNvSpPr>
           <p:nvPr>
-            <p:ph type="body" idx="3" sz="quarter"/>
+            <p:ph type="body" sz="quarter" idx="3"/>
           </p:nvPr>
         </p:nvSpPr>
         <p:spPr/>
@@ -2512,7 +2530,7 @@
             <a:spLocks noGrp="1"/>
           </p:cNvSpPr>
           <p:nvPr>
-            <p:ph type="sldNum" idx="5" sz="quarter"/>
+            <p:ph type="sldNum" sz="quarter" idx="5"/>
           </p:nvPr>
         </p:nvSpPr>
         <p:spPr/>
@@ -2563,10 +2581,9 @@
           <a:lstStyle/>
           <a:p>
             <a:r>
-              <a:rPr lang="en-US" smtClean="0"/>
+              <a:rPr lang="en-US"/>
               <a:t>Click to edit Master title style</a:t>
             </a:r>
-            <a:endParaRPr lang="en-US"/>
           </a:p>
         </p:txBody>
       </p:sp>
@@ -2682,10 +2699,9 @@
           </a:lstStyle>
           <a:p>
             <a:r>
-              <a:rPr lang="en-US" smtClean="0"/>
+              <a:rPr lang="en-US"/>
               <a:t>Click to edit Master subtitle style</a:t>
             </a:r>
-            <a:endParaRPr lang="en-US"/>
           </a:p>
         </p:txBody>
       </p:sp>
@@ -2706,7 +2722,7 @@
           <a:p>
             <a:fld id="{5BCAD085-E8A6-8845-BD4E-CB4CCA059FC4}" type="datetimeFigureOut">
               <a:rPr lang="en-US" smtClean="0"/>
-              <a:t>1/27/13</a:t>
+              <a:t>10/29/2026</a:t>
             </a:fld>
             <a:endParaRPr lang="en-US"/>
           </a:p>
@@ -2800,10 +2816,9 @@
           <a:lstStyle/>
           <a:p>
             <a:r>
-              <a:rPr lang="en-US" smtClean="0"/>
+              <a:rPr lang="en-US"/>
               <a:t>Click to edit Master title style</a:t>
             </a:r>
-            <a:endParaRPr lang="en-US"/>
           </a:p>
         </p:txBody>
       </p:sp>
@@ -2824,38 +2839,37 @@
           <a:p>
             <a:pPr lvl="0"/>
             <a:r>
-              <a:rPr lang="en-US" smtClean="0"/>
+              <a:rPr lang="en-US"/>
               <a:t>Click to edit Master text styles</a:t>
             </a:r>
           </a:p>
           <a:p>
             <a:pPr lvl="1"/>
             <a:r>
-              <a:rPr lang="en-US" smtClean="0"/>
+              <a:rPr lang="en-US"/>
               <a:t>Second level</a:t>
             </a:r>
           </a:p>
           <a:p>
             <a:pPr lvl="2"/>
             <a:r>
-              <a:rPr lang="en-US" smtClean="0"/>
+              <a:rPr lang="en-US"/>
               <a:t>Third level</a:t>
             </a:r>
           </a:p>
           <a:p>
             <a:pPr lvl="3"/>
             <a:r>
-              <a:rPr lang="en-US" smtClean="0"/>
+              <a:rPr lang="en-US"/>
               <a:t>Fourth level</a:t>
             </a:r>
           </a:p>
           <a:p>
             <a:pPr lvl="4"/>
             <a:r>
-              <a:rPr lang="en-US" smtClean="0"/>
+              <a:rPr lang="en-US"/>
               <a:t>Fifth level</a:t>
             </a:r>
-            <a:endParaRPr lang="en-US"/>
           </a:p>
         </p:txBody>
       </p:sp>
@@ -2876,7 +2890,7 @@
           <a:p>
             <a:fld id="{5BCAD085-E8A6-8845-BD4E-CB4CCA059FC4}" type="datetimeFigureOut">
               <a:rPr lang="en-US" smtClean="0"/>
-              <a:t>1/27/13</a:t>
+              <a:t>10/29/2026</a:t>
             </a:fld>
             <a:endParaRPr lang="en-US"/>
           </a:p>
@@ -2975,10 +2989,9 @@
           <a:lstStyle/>
           <a:p>
             <a:r>
-              <a:rPr lang="en-US" smtClean="0"/>
+              <a:rPr lang="en-US"/>
               <a:t>Click to edit Master title style</a:t>
             </a:r>
-            <a:endParaRPr lang="en-US"/>
           </a:p>
         </p:txBody>
       </p:sp>
@@ -3004,38 +3017,37 @@
           <a:p>
             <a:pPr lvl="0"/>
             <a:r>
-              <a:rPr lang="en-US" smtClean="0"/>
+              <a:rPr lang="en-US"/>
               <a:t>Click to edit Master text styles</a:t>
             </a:r>
           </a:p>
           <a:p>
             <a:pPr lvl="1"/>
             <a:r>
-              <a:rPr lang="en-US" smtClean="0"/>
+              <a:rPr lang="en-US"/>
               <a:t>Second level</a:t>
             </a:r>
           </a:p>
           <a:p>
             <a:pPr lvl="2"/>
             <a:r>
-              <a:rPr lang="en-US" smtClean="0"/>
+              <a:rPr lang="en-US"/>
               <a:t>Third level</a:t>
             </a:r>
           </a:p>
           <a:p>
             <a:pPr lvl="3"/>
             <a:r>
-              <a:rPr lang="en-US" smtClean="0"/>
+              <a:rPr lang="en-US"/>
               <a:t>Fourth level</a:t>
             </a:r>
           </a:p>
           <a:p>
             <a:pPr lvl="4"/>
             <a:r>
-              <a:rPr lang="en-US" smtClean="0"/>
+              <a:rPr lang="en-US"/>
               <a:t>Fifth level</a:t>
             </a:r>
-            <a:endParaRPr lang="en-US"/>
           </a:p>
         </p:txBody>
       </p:sp>
@@ -3056,7 +3068,7 @@
           <a:p>
             <a:fld id="{5BCAD085-E8A6-8845-BD4E-CB4CCA059FC4}" type="datetimeFigureOut">
               <a:rPr lang="en-US" smtClean="0"/>
-              <a:t>1/27/13</a:t>
+              <a:t>10/29/2026</a:t>
             </a:fld>
             <a:endParaRPr lang="en-US"/>
           </a:p>
@@ -3150,10 +3162,9 @@
           <a:lstStyle/>
           <a:p>
             <a:r>
-              <a:rPr lang="en-US" smtClean="0"/>
+              <a:rPr lang="en-US"/>
               <a:t>Click to edit Master title style</a:t>
             </a:r>
-            <a:endParaRPr lang="en-US"/>
           </a:p>
         </p:txBody>
       </p:sp>
@@ -3174,38 +3185,37 @@
           <a:p>
             <a:pPr lvl="0"/>
             <a:r>
-              <a:rPr lang="en-US" smtClean="0"/>
+              <a:rPr lang="en-US"/>
               <a:t>Click to edit Master text styles</a:t>
             </a:r>
           </a:p>
           <a:p>
             <a:pPr lvl="1"/>
             <a:r>
-              <a:rPr lang="en-US" smtClean="0"/>
+              <a:rPr lang="en-US"/>
               <a:t>Second level</a:t>
             </a:r>
           </a:p>
           <a:p>
             <a:pPr lvl="2"/>
             <a:r>
-              <a:rPr lang="en-US" smtClean="0"/>
+              <a:rPr lang="en-US"/>
               <a:t>Third level</a:t>
             </a:r>
           </a:p>
           <a:p>
             <a:pPr lvl="3"/>
             <a:r>
-              <a:rPr lang="en-US" smtClean="0"/>
+              <a:rPr lang="en-US"/>
               <a:t>Fourth level</a:t>
             </a:r>
           </a:p>
           <a:p>
             <a:pPr lvl="4"/>
             <a:r>
-              <a:rPr lang="en-US" smtClean="0"/>
+              <a:rPr lang="en-US"/>
               <a:t>Fifth level</a:t>
             </a:r>
-            <a:endParaRPr lang="en-US"/>
           </a:p>
         </p:txBody>
       </p:sp>
@@ -3226,7 +3236,7 @@
           <a:p>
             <a:fld id="{5BCAD085-E8A6-8845-BD4E-CB4CCA059FC4}" type="datetimeFigureOut">
               <a:rPr lang="en-US" smtClean="0"/>
-              <a:t>1/27/13</a:t>
+              <a:t>10/29/2026</a:t>
             </a:fld>
             <a:endParaRPr lang="en-US"/>
           </a:p>
@@ -3329,10 +3339,9 @@
           </a:lstStyle>
           <a:p>
             <a:r>
-              <a:rPr lang="en-US" smtClean="0"/>
+              <a:rPr lang="en-US"/>
               <a:t>Click to edit Master title style</a:t>
             </a:r>
-            <a:endParaRPr lang="en-US"/>
           </a:p>
         </p:txBody>
       </p:sp>
@@ -3449,7 +3458,7 @@
           <a:p>
             <a:pPr lvl="0"/>
             <a:r>
-              <a:rPr lang="en-US" smtClean="0"/>
+              <a:rPr lang="en-US"/>
               <a:t>Click to edit Master text styles</a:t>
             </a:r>
           </a:p>
@@ -3472,7 +3481,7 @@
           <a:p>
             <a:fld id="{5BCAD085-E8A6-8845-BD4E-CB4CCA059FC4}" type="datetimeFigureOut">
               <a:rPr lang="en-US" smtClean="0"/>
-              <a:t>1/27/13</a:t>
+              <a:t>10/29/2026</a:t>
             </a:fld>
             <a:endParaRPr lang="en-US"/>
           </a:p>
@@ -3566,10 +3575,9 @@
           <a:lstStyle/>
           <a:p>
             <a:r>
-              <a:rPr lang="en-US" smtClean="0"/>
+              <a:rPr lang="en-US"/>
               <a:t>Click to edit Master title style</a:t>
             </a:r>
-            <a:endParaRPr lang="en-US"/>
           </a:p>
         </p:txBody>
       </p:sp>
@@ -3623,38 +3631,37 @@
           <a:p>
             <a:pPr lvl="0"/>
             <a:r>
-              <a:rPr lang="en-US" smtClean="0"/>
+              <a:rPr lang="en-US"/>
               <a:t>Click to edit Master text styles</a:t>
             </a:r>
           </a:p>
           <a:p>
             <a:pPr lvl="1"/>
             <a:r>
-              <a:rPr lang="en-US" smtClean="0"/>
+              <a:rPr lang="en-US"/>
               <a:t>Second level</a:t>
             </a:r>
           </a:p>
           <a:p>
             <a:pPr lvl="2"/>
             <a:r>
-              <a:rPr lang="en-US" smtClean="0"/>
+              <a:rPr lang="en-US"/>
               <a:t>Third level</a:t>
             </a:r>
           </a:p>
           <a:p>
             <a:pPr lvl="3"/>
             <a:r>
-              <a:rPr lang="en-US" smtClean="0"/>
+              <a:rPr lang="en-US"/>
               <a:t>Fourth level</a:t>
             </a:r>
           </a:p>
           <a:p>
             <a:pPr lvl="4"/>
             <a:r>
-              <a:rPr lang="en-US" smtClean="0"/>
+              <a:rPr lang="en-US"/>
               <a:t>Fifth level</a:t>
             </a:r>
-            <a:endParaRPr lang="en-US"/>
           </a:p>
         </p:txBody>
       </p:sp>
@@ -3708,38 +3715,37 @@
           <a:p>
             <a:pPr lvl="0"/>
             <a:r>
-              <a:rPr lang="en-US" smtClean="0"/>
+              <a:rPr lang="en-US"/>
               <a:t>Click to edit Master text styles</a:t>
             </a:r>
           </a:p>
           <a:p>
             <a:pPr lvl="1"/>
             <a:r>
-              <a:rPr lang="en-US" smtClean="0"/>
+              <a:rPr lang="en-US"/>
               <a:t>Second level</a:t>
             </a:r>
           </a:p>
           <a:p>
             <a:pPr lvl="2"/>
             <a:r>
-              <a:rPr lang="en-US" smtClean="0"/>
+              <a:rPr lang="en-US"/>
               <a:t>Third level</a:t>
             </a:r>
           </a:p>
           <a:p>
             <a:pPr lvl="3"/>
             <a:r>
-              <a:rPr lang="en-US" smtClean="0"/>
+              <a:rPr lang="en-US"/>
               <a:t>Fourth level</a:t>
             </a:r>
           </a:p>
           <a:p>
             <a:pPr lvl="4"/>
             <a:r>
-              <a:rPr lang="en-US" smtClean="0"/>
+              <a:rPr lang="en-US"/>
               <a:t>Fifth level</a:t>
             </a:r>
-            <a:endParaRPr lang="en-US"/>
           </a:p>
         </p:txBody>
       </p:sp>
@@ -3760,7 +3766,7 @@
           <a:p>
             <a:fld id="{5BCAD085-E8A6-8845-BD4E-CB4CCA059FC4}" type="datetimeFigureOut">
               <a:rPr lang="en-US" smtClean="0"/>
-              <a:t>1/27/13</a:t>
+              <a:t>10/29/2026</a:t>
             </a:fld>
             <a:endParaRPr lang="en-US"/>
           </a:p>
@@ -3858,10 +3864,9 @@
           </a:lstStyle>
           <a:p>
             <a:r>
-              <a:rPr lang="en-US" smtClean="0"/>
+              <a:rPr lang="en-US"/>
               <a:t>Click to edit Master title style</a:t>
             </a:r>
-            <a:endParaRPr lang="en-US"/>
           </a:p>
         </p:txBody>
       </p:sp>
@@ -3924,7 +3929,7 @@
           <a:p>
             <a:pPr lvl="0"/>
             <a:r>
-              <a:rPr lang="en-US" smtClean="0"/>
+              <a:rPr lang="en-US"/>
               <a:t>Click to edit Master text styles</a:t>
             </a:r>
           </a:p>
@@ -3980,38 +3985,37 @@
           <a:p>
             <a:pPr lvl="0"/>
             <a:r>
-              <a:rPr lang="en-US" smtClean="0"/>
+              <a:rPr lang="en-US"/>
               <a:t>Click to edit Master text styles</a:t>
             </a:r>
           </a:p>
           <a:p>
             <a:pPr lvl="1"/>
             <a:r>
-              <a:rPr lang="en-US" smtClean="0"/>
+              <a:rPr lang="en-US"/>
               <a:t>Second level</a:t>
             </a:r>
           </a:p>
           <a:p>
             <a:pPr lvl="2"/>
             <a:r>
-              <a:rPr lang="en-US" smtClean="0"/>
+              <a:rPr lang="en-US"/>
               <a:t>Third level</a:t>
             </a:r>
           </a:p>
           <a:p>
             <a:pPr lvl="3"/>
             <a:r>
-              <a:rPr lang="en-US" smtClean="0"/>
+              <a:rPr lang="en-US"/>
               <a:t>Fourth level</a:t>
             </a:r>
           </a:p>
           <a:p>
             <a:pPr lvl="4"/>
             <a:r>
-              <a:rPr lang="en-US" smtClean="0"/>
+              <a:rPr lang="en-US"/>
               <a:t>Fifth level</a:t>
             </a:r>
-            <a:endParaRPr lang="en-US"/>
           </a:p>
         </p:txBody>
       </p:sp>
@@ -4074,7 +4078,7 @@
           <a:p>
             <a:pPr lvl="0"/>
             <a:r>
-              <a:rPr lang="en-US" smtClean="0"/>
+              <a:rPr lang="en-US"/>
               <a:t>Click to edit Master text styles</a:t>
             </a:r>
           </a:p>
@@ -4130,38 +4134,37 @@
           <a:p>
             <a:pPr lvl="0"/>
             <a:r>
-              <a:rPr lang="en-US" smtClean="0"/>
+              <a:rPr lang="en-US"/>
               <a:t>Click to edit Master text styles</a:t>
             </a:r>
           </a:p>
           <a:p>
             <a:pPr lvl="1"/>
             <a:r>
-              <a:rPr lang="en-US" smtClean="0"/>
+              <a:rPr lang="en-US"/>
               <a:t>Second level</a:t>
             </a:r>
           </a:p>
           <a:p>
             <a:pPr lvl="2"/>
             <a:r>
-              <a:rPr lang="en-US" smtClean="0"/>
+              <a:rPr lang="en-US"/>
               <a:t>Third level</a:t>
             </a:r>
           </a:p>
           <a:p>
             <a:pPr lvl="3"/>
             <a:r>
-              <a:rPr lang="en-US" smtClean="0"/>
+              <a:rPr lang="en-US"/>
               <a:t>Fourth level</a:t>
             </a:r>
           </a:p>
           <a:p>
             <a:pPr lvl="4"/>
             <a:r>
-              <a:rPr lang="en-US" smtClean="0"/>
+              <a:rPr lang="en-US"/>
               <a:t>Fifth level</a:t>
             </a:r>
-            <a:endParaRPr lang="en-US"/>
           </a:p>
         </p:txBody>
       </p:sp>
@@ -4182,7 +4185,7 @@
           <a:p>
             <a:fld id="{5BCAD085-E8A6-8845-BD4E-CB4CCA059FC4}" type="datetimeFigureOut">
               <a:rPr lang="en-US" smtClean="0"/>
-              <a:t>1/27/13</a:t>
+              <a:t>10/29/2026</a:t>
             </a:fld>
             <a:endParaRPr lang="en-US"/>
           </a:p>
@@ -4276,10 +4279,9 @@
           <a:lstStyle/>
           <a:p>
             <a:r>
-              <a:rPr lang="en-US" smtClean="0"/>
+              <a:rPr lang="en-US"/>
               <a:t>Click to edit Master title style</a:t>
             </a:r>
-            <a:endParaRPr lang="en-US"/>
           </a:p>
         </p:txBody>
       </p:sp>
@@ -4300,7 +4302,7 @@
           <a:p>
             <a:fld id="{5BCAD085-E8A6-8845-BD4E-CB4CCA059FC4}" type="datetimeFigureOut">
               <a:rPr lang="en-US" smtClean="0"/>
-              <a:t>1/27/13</a:t>
+              <a:t>10/29/2026</a:t>
             </a:fld>
             <a:endParaRPr lang="en-US"/>
           </a:p>
@@ -4395,7 +4397,7 @@
           <a:p>
             <a:fld id="{5BCAD085-E8A6-8845-BD4E-CB4CCA059FC4}" type="datetimeFigureOut">
               <a:rPr lang="en-US" smtClean="0"/>
-              <a:t>1/27/13</a:t>
+              <a:t>10/29/2026</a:t>
             </a:fld>
             <a:endParaRPr lang="en-US"/>
           </a:p>
@@ -4498,10 +4500,9 @@
           </a:lstStyle>
           <a:p>
             <a:r>
-              <a:rPr lang="en-US" smtClean="0"/>
+              <a:rPr lang="en-US"/>
               <a:t>Click to edit Master title style</a:t>
             </a:r>
-            <a:endParaRPr lang="en-US"/>
           </a:p>
         </p:txBody>
       </p:sp>
@@ -4555,38 +4556,37 @@
           <a:p>
             <a:pPr lvl="0"/>
             <a:r>
-              <a:rPr lang="en-US" smtClean="0"/>
+              <a:rPr lang="en-US"/>
               <a:t>Click to edit Master text styles</a:t>
             </a:r>
           </a:p>
           <a:p>
             <a:pPr lvl="1"/>
             <a:r>
-              <a:rPr lang="en-US" smtClean="0"/>
+              <a:rPr lang="en-US"/>
               <a:t>Second level</a:t>
             </a:r>
           </a:p>
           <a:p>
             <a:pPr lvl="2"/>
             <a:r>
-              <a:rPr lang="en-US" smtClean="0"/>
+              <a:rPr lang="en-US"/>
               <a:t>Third level</a:t>
             </a:r>
           </a:p>
           <a:p>
             <a:pPr lvl="3"/>
             <a:r>
-              <a:rPr lang="en-US" smtClean="0"/>
+              <a:rPr lang="en-US"/>
               <a:t>Fourth level</a:t>
             </a:r>
           </a:p>
           <a:p>
             <a:pPr lvl="4"/>
             <a:r>
-              <a:rPr lang="en-US" smtClean="0"/>
+              <a:rPr lang="en-US"/>
               <a:t>Fifth level</a:t>
             </a:r>
-            <a:endParaRPr lang="en-US"/>
           </a:p>
         </p:txBody>
       </p:sp>
@@ -4649,7 +4649,7 @@
           <a:p>
             <a:pPr lvl="0"/>
             <a:r>
-              <a:rPr lang="en-US" smtClean="0"/>
+              <a:rPr lang="en-US"/>
               <a:t>Click to edit Master text styles</a:t>
             </a:r>
           </a:p>
@@ -4672,7 +4672,7 @@
           <a:p>
             <a:fld id="{5BCAD085-E8A6-8845-BD4E-CB4CCA059FC4}" type="datetimeFigureOut">
               <a:rPr lang="en-US" smtClean="0"/>
-              <a:t>1/27/13</a:t>
+              <a:t>10/29/2026</a:t>
             </a:fld>
             <a:endParaRPr lang="en-US"/>
           </a:p>
@@ -4775,10 +4775,9 @@
           </a:lstStyle>
           <a:p>
             <a:r>
-              <a:rPr lang="en-US" smtClean="0"/>
+              <a:rPr lang="en-US"/>
               <a:t>Click to edit Master title style</a:t>
             </a:r>
-            <a:endParaRPr lang="en-US"/>
           </a:p>
         </p:txBody>
       </p:sp>
@@ -4902,7 +4901,7 @@
           <a:p>
             <a:pPr lvl="0"/>
             <a:r>
-              <a:rPr lang="en-US" smtClean="0"/>
+              <a:rPr lang="en-US"/>
               <a:t>Click to edit Master text styles</a:t>
             </a:r>
           </a:p>
@@ -4925,7 +4924,7 @@
           <a:p>
             <a:fld id="{5BCAD085-E8A6-8845-BD4E-CB4CCA059FC4}" type="datetimeFigureOut">
               <a:rPr lang="en-US" smtClean="0"/>
-              <a:t>1/27/13</a:t>
+              <a:t>10/29/2026</a:t>
             </a:fld>
             <a:endParaRPr lang="en-US"/>
           </a:p>
@@ -5034,10 +5033,9 @@
           <a:lstStyle/>
           <a:p>
             <a:r>
-              <a:rPr lang="en-US" smtClean="0"/>
+              <a:rPr lang="en-US"/>
               <a:t>Click to edit Master title style</a:t>
             </a:r>
-            <a:endParaRPr lang="en-US"/>
           </a:p>
         </p:txBody>
       </p:sp>
@@ -5068,38 +5066,37 @@
           <a:p>
             <a:pPr lvl="0"/>
             <a:r>
-              <a:rPr lang="en-US" smtClean="0"/>
+              <a:rPr lang="en-US"/>
               <a:t>Click to edit Master text styles</a:t>
             </a:r>
           </a:p>
           <a:p>
             <a:pPr lvl="1"/>
             <a:r>
-              <a:rPr lang="en-US" smtClean="0"/>
+              <a:rPr lang="en-US"/>
               <a:t>Second level</a:t>
             </a:r>
           </a:p>
           <a:p>
             <a:pPr lvl="2"/>
             <a:r>
-              <a:rPr lang="en-US" smtClean="0"/>
+              <a:rPr lang="en-US"/>
               <a:t>Third level</a:t>
             </a:r>
           </a:p>
           <a:p>
             <a:pPr lvl="3"/>
             <a:r>
-              <a:rPr lang="en-US" smtClean="0"/>
+              <a:rPr lang="en-US"/>
               <a:t>Fourth level</a:t>
             </a:r>
           </a:p>
           <a:p>
             <a:pPr lvl="4"/>
             <a:r>
-              <a:rPr lang="en-US" smtClean="0"/>
+              <a:rPr lang="en-US"/>
               <a:t>Fifth level</a:t>
             </a:r>
-            <a:endParaRPr lang="en-US"/>
           </a:p>
         </p:txBody>
       </p:sp>
@@ -5138,7 +5135,7 @@
           <a:p>
             <a:fld id="{5BCAD085-E8A6-8845-BD4E-CB4CCA059FC4}" type="datetimeFigureOut">
               <a:rPr lang="en-US" smtClean="0"/>
-              <a:t>1/27/13</a:t>
+              <a:t>10/29/2026</a:t>
             </a:fld>
             <a:endParaRPr lang="en-US"/>
           </a:p>
@@ -5497,7 +5494,7 @@
 </file>
 
 <file path=ppt/slides/slide1.xml><?xml version="1.0" encoding="utf-8"?>
-<p:sld xmlns:a="http://schemas.openxmlformats.org/drawingml/2006/main" xmlns:p="http://schemas.openxmlformats.org/presentationml/2006/main" xmlns:r="http://schemas.openxmlformats.org/officeDocument/2006/relationships">
+<p:sld xmlns:a="http://schemas.openxmlformats.org/drawingml/2006/main" xmlns:r="http://schemas.openxmlformats.org/officeDocument/2006/relationships" xmlns:p="http://schemas.openxmlformats.org/presentationml/2006/main">
   <p:cSld>
     <p:spTree>
       <p:nvGrpSpPr>
@@ -5505,7 +5502,14 @@
         <p:cNvGrpSpPr/>
         <p:nvPr/>
       </p:nvGrpSpPr>
-      <p:grpSpPr/>
+      <p:grpSpPr>
+        <a:xfrm>
+          <a:off x="0" y="0"/>
+          <a:ext cx="0" cy="0"/>
+          <a:chOff x="0" y="0"/>
+          <a:chExt cx="0" cy="0"/>
+        </a:xfrm>
+      </p:grpSpPr>
       <p:sp>
         <p:nvSpPr>
           <p:cNvPr id="2" name="Rectangle 1"/>
@@ -5547,6 +5551,7 @@
           <a:lstStyle/>
           <a:p>
             <a:pPr algn="ctr"/>
+            <a:endParaRPr/>
           </a:p>
         </p:txBody>
       </p:sp>
@@ -5591,6 +5596,7 @@
           <a:lstStyle/>
           <a:p>
             <a:pPr algn="ctr"/>
+            <a:endParaRPr/>
           </a:p>
         </p:txBody>
       </p:sp>
@@ -5635,6 +5641,7 @@
           <a:lstStyle/>
           <a:p>
             <a:pPr algn="ctr"/>
+            <a:endParaRPr/>
           </a:p>
         </p:txBody>
       </p:sp>
@@ -5686,7 +5693,7 @@
         <p:spPr>
           <a:xfrm>
             <a:off x="731520" y="2377440"/>
-            <a:ext cx="10698480" cy="1554480"/>
+            <a:ext cx="10698480" cy="615553"/>
           </a:xfrm>
           <a:prstGeom prst="rect">
             <a:avLst/>
@@ -5705,14 +5712,20 @@
               </a:spcAft>
             </a:pPr>
             <a:r>
-              <a:rPr sz="3400" b="1">
+              <a:rPr lang="ko-KR" altLang="en-US" sz="3400" b="1" dirty="0">
                 <a:solidFill>
                   <a:srgbClr val="C0392B"/>
                 </a:solidFill>
                 <a:latin typeface="맑은 고딕"/>
               </a:rPr>
-              <a:t>RAC</a:t>
-            </a:r>
+              <a:t>동적 데이터베이스 서비스</a:t>
+            </a:r>
+            <a:endParaRPr sz="3400" b="1" dirty="0">
+              <a:solidFill>
+                <a:srgbClr val="C0392B"/>
+              </a:solidFill>
+              <a:latin typeface="맑은 고딕"/>
+            </a:endParaRPr>
           </a:p>
         </p:txBody>
       </p:sp>
@@ -5803,7 +5816,7 @@
 </file>
 
 <file path=ppt/slides/slide10.xml><?xml version="1.0" encoding="utf-8"?>
-<p:sld xmlns:a="http://schemas.openxmlformats.org/drawingml/2006/main" xmlns:p="http://schemas.openxmlformats.org/presentationml/2006/main" xmlns:r="http://schemas.openxmlformats.org/officeDocument/2006/relationships">
+<p:sld xmlns:a="http://schemas.openxmlformats.org/drawingml/2006/main" xmlns:r="http://schemas.openxmlformats.org/officeDocument/2006/relationships" xmlns:p="http://schemas.openxmlformats.org/presentationml/2006/main">
   <p:cSld>
     <p:spTree>
       <p:nvGrpSpPr>
@@ -5811,7 +5824,14 @@
         <p:cNvGrpSpPr/>
         <p:nvPr/>
       </p:nvGrpSpPr>
-      <p:grpSpPr/>
+      <p:grpSpPr>
+        <a:xfrm>
+          <a:off x="0" y="0"/>
+          <a:ext cx="0" cy="0"/>
+          <a:chOff x="0" y="0"/>
+          <a:chExt cx="0" cy="0"/>
+        </a:xfrm>
+      </p:grpSpPr>
       <p:sp>
         <p:nvSpPr>
           <p:cNvPr id="2" name="Rectangle 1"/>
@@ -5853,6 +5873,7 @@
           <a:lstStyle/>
           <a:p>
             <a:pPr algn="ctr"/>
+            <a:endParaRPr/>
           </a:p>
         </p:txBody>
       </p:sp>
@@ -6030,7 +6051,7 @@
 </file>
 
 <file path=ppt/slides/slide11.xml><?xml version="1.0" encoding="utf-8"?>
-<p:sld xmlns:a="http://schemas.openxmlformats.org/drawingml/2006/main" xmlns:p="http://schemas.openxmlformats.org/presentationml/2006/main" xmlns:r="http://schemas.openxmlformats.org/officeDocument/2006/relationships">
+<p:sld xmlns:a="http://schemas.openxmlformats.org/drawingml/2006/main" xmlns:r="http://schemas.openxmlformats.org/officeDocument/2006/relationships" xmlns:p="http://schemas.openxmlformats.org/presentationml/2006/main">
   <p:cSld>
     <p:spTree>
       <p:nvGrpSpPr>
@@ -6038,7 +6059,14 @@
         <p:cNvGrpSpPr/>
         <p:nvPr/>
       </p:nvGrpSpPr>
-      <p:grpSpPr/>
+      <p:grpSpPr>
+        <a:xfrm>
+          <a:off x="0" y="0"/>
+          <a:ext cx="0" cy="0"/>
+          <a:chOff x="0" y="0"/>
+          <a:chExt cx="0" cy="0"/>
+        </a:xfrm>
+      </p:grpSpPr>
       <p:sp>
         <p:nvSpPr>
           <p:cNvPr id="2" name="Rectangle 1"/>
@@ -6080,6 +6108,7 @@
           <a:lstStyle/>
           <a:p>
             <a:pPr algn="ctr"/>
+            <a:endParaRPr/>
           </a:p>
         </p:txBody>
       </p:sp>
@@ -6202,6 +6231,7 @@
           <a:lstStyle/>
           <a:p>
             <a:pPr algn="ctr"/>
+            <a:endParaRPr/>
           </a:p>
         </p:txBody>
       </p:sp>
@@ -6269,7 +6299,7 @@
 </file>
 
 <file path=ppt/slides/slide12.xml><?xml version="1.0" encoding="utf-8"?>
-<p:sld xmlns:a="http://schemas.openxmlformats.org/drawingml/2006/main" xmlns:p="http://schemas.openxmlformats.org/presentationml/2006/main" xmlns:r="http://schemas.openxmlformats.org/officeDocument/2006/relationships">
+<p:sld xmlns:a="http://schemas.openxmlformats.org/drawingml/2006/main" xmlns:r="http://schemas.openxmlformats.org/officeDocument/2006/relationships" xmlns:p="http://schemas.openxmlformats.org/presentationml/2006/main">
   <p:cSld>
     <p:spTree>
       <p:nvGrpSpPr>
@@ -6277,7 +6307,14 @@
         <p:cNvGrpSpPr/>
         <p:nvPr/>
       </p:nvGrpSpPr>
-      <p:grpSpPr/>
+      <p:grpSpPr>
+        <a:xfrm>
+          <a:off x="0" y="0"/>
+          <a:ext cx="0" cy="0"/>
+          <a:chOff x="0" y="0"/>
+          <a:chExt cx="0" cy="0"/>
+        </a:xfrm>
+      </p:grpSpPr>
       <p:sp>
         <p:nvSpPr>
           <p:cNvPr id="2" name="Rectangle 1"/>
@@ -6319,6 +6356,7 @@
           <a:lstStyle/>
           <a:p>
             <a:pPr algn="ctr"/>
+            <a:endParaRPr/>
           </a:p>
         </p:txBody>
       </p:sp>
@@ -6512,7 +6550,7 @@
 </file>
 
 <file path=ppt/slides/slide13.xml><?xml version="1.0" encoding="utf-8"?>
-<p:sld xmlns:a="http://schemas.openxmlformats.org/drawingml/2006/main" xmlns:p="http://schemas.openxmlformats.org/presentationml/2006/main" xmlns:r="http://schemas.openxmlformats.org/officeDocument/2006/relationships">
+<p:sld xmlns:a="http://schemas.openxmlformats.org/drawingml/2006/main" xmlns:r="http://schemas.openxmlformats.org/officeDocument/2006/relationships" xmlns:p="http://schemas.openxmlformats.org/presentationml/2006/main">
   <p:cSld>
     <p:spTree>
       <p:nvGrpSpPr>
@@ -6520,7 +6558,14 @@
         <p:cNvGrpSpPr/>
         <p:nvPr/>
       </p:nvGrpSpPr>
-      <p:grpSpPr/>
+      <p:grpSpPr>
+        <a:xfrm>
+          <a:off x="0" y="0"/>
+          <a:ext cx="0" cy="0"/>
+          <a:chOff x="0" y="0"/>
+          <a:chExt cx="0" cy="0"/>
+        </a:xfrm>
+      </p:grpSpPr>
       <p:sp>
         <p:nvSpPr>
           <p:cNvPr id="2" name="Rectangle 1"/>
@@ -6562,6 +6607,7 @@
           <a:lstStyle/>
           <a:p>
             <a:pPr algn="ctr"/>
+            <a:endParaRPr/>
           </a:p>
         </p:txBody>
       </p:sp>
@@ -6755,7 +6801,7 @@
 </file>
 
 <file path=ppt/slides/slide14.xml><?xml version="1.0" encoding="utf-8"?>
-<p:sld xmlns:a="http://schemas.openxmlformats.org/drawingml/2006/main" xmlns:p="http://schemas.openxmlformats.org/presentationml/2006/main" xmlns:r="http://schemas.openxmlformats.org/officeDocument/2006/relationships">
+<p:sld xmlns:a="http://schemas.openxmlformats.org/drawingml/2006/main" xmlns:r="http://schemas.openxmlformats.org/officeDocument/2006/relationships" xmlns:p="http://schemas.openxmlformats.org/presentationml/2006/main">
   <p:cSld>
     <p:spTree>
       <p:nvGrpSpPr>
@@ -6763,7 +6809,14 @@
         <p:cNvGrpSpPr/>
         <p:nvPr/>
       </p:nvGrpSpPr>
-      <p:grpSpPr/>
+      <p:grpSpPr>
+        <a:xfrm>
+          <a:off x="0" y="0"/>
+          <a:ext cx="0" cy="0"/>
+          <a:chOff x="0" y="0"/>
+          <a:chExt cx="0" cy="0"/>
+        </a:xfrm>
+      </p:grpSpPr>
       <p:sp>
         <p:nvSpPr>
           <p:cNvPr id="2" name="Rectangle 1"/>
@@ -6805,6 +6858,7 @@
           <a:lstStyle/>
           <a:p>
             <a:pPr algn="ctr"/>
+            <a:endParaRPr/>
           </a:p>
         </p:txBody>
       </p:sp>
@@ -6998,7 +7052,7 @@
 </file>
 
 <file path=ppt/slides/slide15.xml><?xml version="1.0" encoding="utf-8"?>
-<p:sld xmlns:a="http://schemas.openxmlformats.org/drawingml/2006/main" xmlns:p="http://schemas.openxmlformats.org/presentationml/2006/main" xmlns:r="http://schemas.openxmlformats.org/officeDocument/2006/relationships">
+<p:sld xmlns:a="http://schemas.openxmlformats.org/drawingml/2006/main" xmlns:r="http://schemas.openxmlformats.org/officeDocument/2006/relationships" xmlns:p="http://schemas.openxmlformats.org/presentationml/2006/main">
   <p:cSld>
     <p:spTree>
       <p:nvGrpSpPr>
@@ -7006,7 +7060,14 @@
         <p:cNvGrpSpPr/>
         <p:nvPr/>
       </p:nvGrpSpPr>
-      <p:grpSpPr/>
+      <p:grpSpPr>
+        <a:xfrm>
+          <a:off x="0" y="0"/>
+          <a:ext cx="0" cy="0"/>
+          <a:chOff x="0" y="0"/>
+          <a:chExt cx="0" cy="0"/>
+        </a:xfrm>
+      </p:grpSpPr>
       <p:sp>
         <p:nvSpPr>
           <p:cNvPr id="2" name="Rectangle 1"/>
@@ -7048,6 +7109,7 @@
           <a:lstStyle/>
           <a:p>
             <a:pPr algn="ctr"/>
+            <a:endParaRPr/>
           </a:p>
         </p:txBody>
       </p:sp>
@@ -7241,7 +7303,7 @@
 </file>
 
 <file path=ppt/slides/slide16.xml><?xml version="1.0" encoding="utf-8"?>
-<p:sld xmlns:a="http://schemas.openxmlformats.org/drawingml/2006/main" xmlns:p="http://schemas.openxmlformats.org/presentationml/2006/main" xmlns:r="http://schemas.openxmlformats.org/officeDocument/2006/relationships">
+<p:sld xmlns:a="http://schemas.openxmlformats.org/drawingml/2006/main" xmlns:r="http://schemas.openxmlformats.org/officeDocument/2006/relationships" xmlns:p="http://schemas.openxmlformats.org/presentationml/2006/main">
   <p:cSld>
     <p:spTree>
       <p:nvGrpSpPr>
@@ -7249,7 +7311,14 @@
         <p:cNvGrpSpPr/>
         <p:nvPr/>
       </p:nvGrpSpPr>
-      <p:grpSpPr/>
+      <p:grpSpPr>
+        <a:xfrm>
+          <a:off x="0" y="0"/>
+          <a:ext cx="0" cy="0"/>
+          <a:chOff x="0" y="0"/>
+          <a:chExt cx="0" cy="0"/>
+        </a:xfrm>
+      </p:grpSpPr>
       <p:sp>
         <p:nvSpPr>
           <p:cNvPr id="2" name="Rectangle 1"/>
@@ -7291,6 +7360,7 @@
           <a:lstStyle/>
           <a:p>
             <a:pPr algn="ctr"/>
+            <a:endParaRPr/>
           </a:p>
         </p:txBody>
       </p:sp>
@@ -7413,6 +7483,7 @@
           <a:lstStyle/>
           <a:p>
             <a:pPr algn="ctr"/>
+            <a:endParaRPr/>
           </a:p>
         </p:txBody>
       </p:sp>
@@ -7480,7 +7551,7 @@
 </file>
 
 <file path=ppt/slides/slide17.xml><?xml version="1.0" encoding="utf-8"?>
-<p:sld xmlns:a="http://schemas.openxmlformats.org/drawingml/2006/main" xmlns:p="http://schemas.openxmlformats.org/presentationml/2006/main" xmlns:r="http://schemas.openxmlformats.org/officeDocument/2006/relationships">
+<p:sld xmlns:a="http://schemas.openxmlformats.org/drawingml/2006/main" xmlns:r="http://schemas.openxmlformats.org/officeDocument/2006/relationships" xmlns:p="http://schemas.openxmlformats.org/presentationml/2006/main">
   <p:cSld>
     <p:spTree>
       <p:nvGrpSpPr>
@@ -7488,7 +7559,14 @@
         <p:cNvGrpSpPr/>
         <p:nvPr/>
       </p:nvGrpSpPr>
-      <p:grpSpPr/>
+      <p:grpSpPr>
+        <a:xfrm>
+          <a:off x="0" y="0"/>
+          <a:ext cx="0" cy="0"/>
+          <a:chOff x="0" y="0"/>
+          <a:chExt cx="0" cy="0"/>
+        </a:xfrm>
+      </p:grpSpPr>
       <p:sp>
         <p:nvSpPr>
           <p:cNvPr id="2" name="Rectangle 1"/>
@@ -7530,6 +7608,7 @@
           <a:lstStyle/>
           <a:p>
             <a:pPr algn="ctr"/>
+            <a:endParaRPr/>
           </a:p>
         </p:txBody>
       </p:sp>
@@ -7723,7 +7802,7 @@
 </file>
 
 <file path=ppt/slides/slide18.xml><?xml version="1.0" encoding="utf-8"?>
-<p:sld xmlns:a="http://schemas.openxmlformats.org/drawingml/2006/main" xmlns:p="http://schemas.openxmlformats.org/presentationml/2006/main" xmlns:r="http://schemas.openxmlformats.org/officeDocument/2006/relationships">
+<p:sld xmlns:a="http://schemas.openxmlformats.org/drawingml/2006/main" xmlns:r="http://schemas.openxmlformats.org/officeDocument/2006/relationships" xmlns:p="http://schemas.openxmlformats.org/presentationml/2006/main">
   <p:cSld>
     <p:spTree>
       <p:nvGrpSpPr>
@@ -7731,7 +7810,14 @@
         <p:cNvGrpSpPr/>
         <p:nvPr/>
       </p:nvGrpSpPr>
-      <p:grpSpPr/>
+      <p:grpSpPr>
+        <a:xfrm>
+          <a:off x="0" y="0"/>
+          <a:ext cx="0" cy="0"/>
+          <a:chOff x="0" y="0"/>
+          <a:chExt cx="0" cy="0"/>
+        </a:xfrm>
+      </p:grpSpPr>
       <p:sp>
         <p:nvSpPr>
           <p:cNvPr id="2" name="Rectangle 1"/>
@@ -7773,6 +7859,7 @@
           <a:lstStyle/>
           <a:p>
             <a:pPr algn="ctr"/>
+            <a:endParaRPr/>
           </a:p>
         </p:txBody>
       </p:sp>
@@ -7966,7 +8053,7 @@
 </file>
 
 <file path=ppt/slides/slide19.xml><?xml version="1.0" encoding="utf-8"?>
-<p:sld xmlns:a="http://schemas.openxmlformats.org/drawingml/2006/main" xmlns:p="http://schemas.openxmlformats.org/presentationml/2006/main" xmlns:r="http://schemas.openxmlformats.org/officeDocument/2006/relationships">
+<p:sld xmlns:a="http://schemas.openxmlformats.org/drawingml/2006/main" xmlns:r="http://schemas.openxmlformats.org/officeDocument/2006/relationships" xmlns:p="http://schemas.openxmlformats.org/presentationml/2006/main">
   <p:cSld>
     <p:spTree>
       <p:nvGrpSpPr>
@@ -7974,7 +8061,14 @@
         <p:cNvGrpSpPr/>
         <p:nvPr/>
       </p:nvGrpSpPr>
-      <p:grpSpPr/>
+      <p:grpSpPr>
+        <a:xfrm>
+          <a:off x="0" y="0"/>
+          <a:ext cx="0" cy="0"/>
+          <a:chOff x="0" y="0"/>
+          <a:chExt cx="0" cy="0"/>
+        </a:xfrm>
+      </p:grpSpPr>
       <p:sp>
         <p:nvSpPr>
           <p:cNvPr id="2" name="Rectangle 1"/>
@@ -8016,6 +8110,7 @@
           <a:lstStyle/>
           <a:p>
             <a:pPr algn="ctr"/>
+            <a:endParaRPr/>
           </a:p>
         </p:txBody>
       </p:sp>
@@ -8209,7 +8304,7 @@
 </file>
 
 <file path=ppt/slides/slide2.xml><?xml version="1.0" encoding="utf-8"?>
-<p:sld xmlns:a="http://schemas.openxmlformats.org/drawingml/2006/main" xmlns:p="http://schemas.openxmlformats.org/presentationml/2006/main" xmlns:r="http://schemas.openxmlformats.org/officeDocument/2006/relationships">
+<p:sld xmlns:a="http://schemas.openxmlformats.org/drawingml/2006/main" xmlns:r="http://schemas.openxmlformats.org/officeDocument/2006/relationships" xmlns:p="http://schemas.openxmlformats.org/presentationml/2006/main">
   <p:cSld>
     <p:spTree>
       <p:nvGrpSpPr>
@@ -8217,7 +8312,14 @@
         <p:cNvGrpSpPr/>
         <p:nvPr/>
       </p:nvGrpSpPr>
-      <p:grpSpPr/>
+      <p:grpSpPr>
+        <a:xfrm>
+          <a:off x="0" y="0"/>
+          <a:ext cx="0" cy="0"/>
+          <a:chOff x="0" y="0"/>
+          <a:chExt cx="0" cy="0"/>
+        </a:xfrm>
+      </p:grpSpPr>
       <p:sp>
         <p:nvSpPr>
           <p:cNvPr id="2" name="Rectangle 1"/>
@@ -8259,6 +8361,7 @@
           <a:lstStyle/>
           <a:p>
             <a:pPr algn="ctr"/>
+            <a:endParaRPr/>
           </a:p>
         </p:txBody>
       </p:sp>
@@ -8429,7 +8532,7 @@
 </file>
 
 <file path=ppt/slides/slide20.xml><?xml version="1.0" encoding="utf-8"?>
-<p:sld xmlns:a="http://schemas.openxmlformats.org/drawingml/2006/main" xmlns:p="http://schemas.openxmlformats.org/presentationml/2006/main" xmlns:r="http://schemas.openxmlformats.org/officeDocument/2006/relationships">
+<p:sld xmlns:a="http://schemas.openxmlformats.org/drawingml/2006/main" xmlns:r="http://schemas.openxmlformats.org/officeDocument/2006/relationships" xmlns:p="http://schemas.openxmlformats.org/presentationml/2006/main">
   <p:cSld>
     <p:spTree>
       <p:nvGrpSpPr>
@@ -8437,7 +8540,14 @@
         <p:cNvGrpSpPr/>
         <p:nvPr/>
       </p:nvGrpSpPr>
-      <p:grpSpPr/>
+      <p:grpSpPr>
+        <a:xfrm>
+          <a:off x="0" y="0"/>
+          <a:ext cx="0" cy="0"/>
+          <a:chOff x="0" y="0"/>
+          <a:chExt cx="0" cy="0"/>
+        </a:xfrm>
+      </p:grpSpPr>
       <p:sp>
         <p:nvSpPr>
           <p:cNvPr id="2" name="Rectangle 1"/>
@@ -8479,6 +8589,7 @@
           <a:lstStyle/>
           <a:p>
             <a:pPr algn="ctr"/>
+            <a:endParaRPr/>
           </a:p>
         </p:txBody>
       </p:sp>
@@ -8601,6 +8712,7 @@
           <a:lstStyle/>
           <a:p>
             <a:pPr algn="ctr"/>
+            <a:endParaRPr/>
           </a:p>
         </p:txBody>
       </p:sp>
@@ -8668,7 +8780,7 @@
 </file>
 
 <file path=ppt/slides/slide21.xml><?xml version="1.0" encoding="utf-8"?>
-<p:sld xmlns:a="http://schemas.openxmlformats.org/drawingml/2006/main" xmlns:p="http://schemas.openxmlformats.org/presentationml/2006/main" xmlns:r="http://schemas.openxmlformats.org/officeDocument/2006/relationships">
+<p:sld xmlns:a="http://schemas.openxmlformats.org/drawingml/2006/main" xmlns:r="http://schemas.openxmlformats.org/officeDocument/2006/relationships" xmlns:p="http://schemas.openxmlformats.org/presentationml/2006/main">
   <p:cSld>
     <p:spTree>
       <p:nvGrpSpPr>
@@ -8676,7 +8788,14 @@
         <p:cNvGrpSpPr/>
         <p:nvPr/>
       </p:nvGrpSpPr>
-      <p:grpSpPr/>
+      <p:grpSpPr>
+        <a:xfrm>
+          <a:off x="0" y="0"/>
+          <a:ext cx="0" cy="0"/>
+          <a:chOff x="0" y="0"/>
+          <a:chExt cx="0" cy="0"/>
+        </a:xfrm>
+      </p:grpSpPr>
       <p:sp>
         <p:nvSpPr>
           <p:cNvPr id="2" name="Rectangle 1"/>
@@ -8718,6 +8837,7 @@
           <a:lstStyle/>
           <a:p>
             <a:pPr algn="ctr"/>
+            <a:endParaRPr/>
           </a:p>
         </p:txBody>
       </p:sp>
@@ -8911,7 +9031,7 @@
 </file>
 
 <file path=ppt/slides/slide22.xml><?xml version="1.0" encoding="utf-8"?>
-<p:sld xmlns:a="http://schemas.openxmlformats.org/drawingml/2006/main" xmlns:p="http://schemas.openxmlformats.org/presentationml/2006/main" xmlns:r="http://schemas.openxmlformats.org/officeDocument/2006/relationships">
+<p:sld xmlns:a="http://schemas.openxmlformats.org/drawingml/2006/main" xmlns:r="http://schemas.openxmlformats.org/officeDocument/2006/relationships" xmlns:p="http://schemas.openxmlformats.org/presentationml/2006/main">
   <p:cSld>
     <p:spTree>
       <p:nvGrpSpPr>
@@ -8919,7 +9039,14 @@
         <p:cNvGrpSpPr/>
         <p:nvPr/>
       </p:nvGrpSpPr>
-      <p:grpSpPr/>
+      <p:grpSpPr>
+        <a:xfrm>
+          <a:off x="0" y="0"/>
+          <a:ext cx="0" cy="0"/>
+          <a:chOff x="0" y="0"/>
+          <a:chExt cx="0" cy="0"/>
+        </a:xfrm>
+      </p:grpSpPr>
       <p:sp>
         <p:nvSpPr>
           <p:cNvPr id="2" name="Rectangle 1"/>
@@ -8961,6 +9088,7 @@
           <a:lstStyle/>
           <a:p>
             <a:pPr algn="ctr"/>
+            <a:endParaRPr/>
           </a:p>
         </p:txBody>
       </p:sp>
@@ -9154,7 +9282,7 @@
 </file>
 
 <file path=ppt/slides/slide23.xml><?xml version="1.0" encoding="utf-8"?>
-<p:sld xmlns:a="http://schemas.openxmlformats.org/drawingml/2006/main" xmlns:p="http://schemas.openxmlformats.org/presentationml/2006/main" xmlns:r="http://schemas.openxmlformats.org/officeDocument/2006/relationships">
+<p:sld xmlns:a="http://schemas.openxmlformats.org/drawingml/2006/main" xmlns:r="http://schemas.openxmlformats.org/officeDocument/2006/relationships" xmlns:p="http://schemas.openxmlformats.org/presentationml/2006/main">
   <p:cSld>
     <p:spTree>
       <p:nvGrpSpPr>
@@ -9162,7 +9290,14 @@
         <p:cNvGrpSpPr/>
         <p:nvPr/>
       </p:nvGrpSpPr>
-      <p:grpSpPr/>
+      <p:grpSpPr>
+        <a:xfrm>
+          <a:off x="0" y="0"/>
+          <a:ext cx="0" cy="0"/>
+          <a:chOff x="0" y="0"/>
+          <a:chExt cx="0" cy="0"/>
+        </a:xfrm>
+      </p:grpSpPr>
       <p:sp>
         <p:nvSpPr>
           <p:cNvPr id="2" name="Rectangle 1"/>
@@ -9204,6 +9339,7 @@
           <a:lstStyle/>
           <a:p>
             <a:pPr algn="ctr"/>
+            <a:endParaRPr/>
           </a:p>
         </p:txBody>
       </p:sp>
@@ -9397,7 +9533,7 @@
 </file>
 
 <file path=ppt/slides/slide24.xml><?xml version="1.0" encoding="utf-8"?>
-<p:sld xmlns:a="http://schemas.openxmlformats.org/drawingml/2006/main" xmlns:p="http://schemas.openxmlformats.org/presentationml/2006/main" xmlns:r="http://schemas.openxmlformats.org/officeDocument/2006/relationships">
+<p:sld xmlns:a="http://schemas.openxmlformats.org/drawingml/2006/main" xmlns:r="http://schemas.openxmlformats.org/officeDocument/2006/relationships" xmlns:p="http://schemas.openxmlformats.org/presentationml/2006/main">
   <p:cSld>
     <p:spTree>
       <p:nvGrpSpPr>
@@ -9405,7 +9541,14 @@
         <p:cNvGrpSpPr/>
         <p:nvPr/>
       </p:nvGrpSpPr>
-      <p:grpSpPr/>
+      <p:grpSpPr>
+        <a:xfrm>
+          <a:off x="0" y="0"/>
+          <a:ext cx="0" cy="0"/>
+          <a:chOff x="0" y="0"/>
+          <a:chExt cx="0" cy="0"/>
+        </a:xfrm>
+      </p:grpSpPr>
       <p:sp>
         <p:nvSpPr>
           <p:cNvPr id="2" name="Rectangle 1"/>
@@ -9447,6 +9590,7 @@
           <a:lstStyle/>
           <a:p>
             <a:pPr algn="ctr"/>
+            <a:endParaRPr/>
           </a:p>
         </p:txBody>
       </p:sp>
@@ -9569,6 +9713,7 @@
           <a:lstStyle/>
           <a:p>
             <a:pPr algn="ctr"/>
+            <a:endParaRPr/>
           </a:p>
         </p:txBody>
       </p:sp>
@@ -9636,7 +9781,7 @@
 </file>
 
 <file path=ppt/slides/slide25.xml><?xml version="1.0" encoding="utf-8"?>
-<p:sld xmlns:a="http://schemas.openxmlformats.org/drawingml/2006/main" xmlns:p="http://schemas.openxmlformats.org/presentationml/2006/main" xmlns:r="http://schemas.openxmlformats.org/officeDocument/2006/relationships">
+<p:sld xmlns:a="http://schemas.openxmlformats.org/drawingml/2006/main" xmlns:r="http://schemas.openxmlformats.org/officeDocument/2006/relationships" xmlns:p="http://schemas.openxmlformats.org/presentationml/2006/main">
   <p:cSld>
     <p:spTree>
       <p:nvGrpSpPr>
@@ -9644,7 +9789,14 @@
         <p:cNvGrpSpPr/>
         <p:nvPr/>
       </p:nvGrpSpPr>
-      <p:grpSpPr/>
+      <p:grpSpPr>
+        <a:xfrm>
+          <a:off x="0" y="0"/>
+          <a:ext cx="0" cy="0"/>
+          <a:chOff x="0" y="0"/>
+          <a:chExt cx="0" cy="0"/>
+        </a:xfrm>
+      </p:grpSpPr>
       <p:sp>
         <p:nvSpPr>
           <p:cNvPr id="2" name="Rectangle 1"/>
@@ -9686,6 +9838,7 @@
           <a:lstStyle/>
           <a:p>
             <a:pPr algn="ctr"/>
+            <a:endParaRPr/>
           </a:p>
         </p:txBody>
       </p:sp>
@@ -9879,7 +10032,7 @@
 </file>
 
 <file path=ppt/slides/slide26.xml><?xml version="1.0" encoding="utf-8"?>
-<p:sld xmlns:a="http://schemas.openxmlformats.org/drawingml/2006/main" xmlns:p="http://schemas.openxmlformats.org/presentationml/2006/main" xmlns:r="http://schemas.openxmlformats.org/officeDocument/2006/relationships">
+<p:sld xmlns:a="http://schemas.openxmlformats.org/drawingml/2006/main" xmlns:r="http://schemas.openxmlformats.org/officeDocument/2006/relationships" xmlns:p="http://schemas.openxmlformats.org/presentationml/2006/main">
   <p:cSld>
     <p:spTree>
       <p:nvGrpSpPr>
@@ -9887,7 +10040,14 @@
         <p:cNvGrpSpPr/>
         <p:nvPr/>
       </p:nvGrpSpPr>
-      <p:grpSpPr/>
+      <p:grpSpPr>
+        <a:xfrm>
+          <a:off x="0" y="0"/>
+          <a:ext cx="0" cy="0"/>
+          <a:chOff x="0" y="0"/>
+          <a:chExt cx="0" cy="0"/>
+        </a:xfrm>
+      </p:grpSpPr>
       <p:sp>
         <p:nvSpPr>
           <p:cNvPr id="2" name="Rectangle 1"/>
@@ -9929,6 +10089,7 @@
           <a:lstStyle/>
           <a:p>
             <a:pPr algn="ctr"/>
+            <a:endParaRPr/>
           </a:p>
         </p:txBody>
       </p:sp>
@@ -10122,7 +10283,7 @@
 </file>
 
 <file path=ppt/slides/slide27.xml><?xml version="1.0" encoding="utf-8"?>
-<p:sld xmlns:a="http://schemas.openxmlformats.org/drawingml/2006/main" xmlns:p="http://schemas.openxmlformats.org/presentationml/2006/main" xmlns:r="http://schemas.openxmlformats.org/officeDocument/2006/relationships">
+<p:sld xmlns:a="http://schemas.openxmlformats.org/drawingml/2006/main" xmlns:r="http://schemas.openxmlformats.org/officeDocument/2006/relationships" xmlns:p="http://schemas.openxmlformats.org/presentationml/2006/main">
   <p:cSld>
     <p:spTree>
       <p:nvGrpSpPr>
@@ -10130,7 +10291,14 @@
         <p:cNvGrpSpPr/>
         <p:nvPr/>
       </p:nvGrpSpPr>
-      <p:grpSpPr/>
+      <p:grpSpPr>
+        <a:xfrm>
+          <a:off x="0" y="0"/>
+          <a:ext cx="0" cy="0"/>
+          <a:chOff x="0" y="0"/>
+          <a:chExt cx="0" cy="0"/>
+        </a:xfrm>
+      </p:grpSpPr>
       <p:sp>
         <p:nvSpPr>
           <p:cNvPr id="2" name="Rectangle 1"/>
@@ -10172,6 +10340,7 @@
           <a:lstStyle/>
           <a:p>
             <a:pPr algn="ctr"/>
+            <a:endParaRPr/>
           </a:p>
         </p:txBody>
       </p:sp>
@@ -10365,7 +10534,7 @@
 </file>
 
 <file path=ppt/slides/slide28.xml><?xml version="1.0" encoding="utf-8"?>
-<p:sld xmlns:a="http://schemas.openxmlformats.org/drawingml/2006/main" xmlns:p="http://schemas.openxmlformats.org/presentationml/2006/main" xmlns:r="http://schemas.openxmlformats.org/officeDocument/2006/relationships">
+<p:sld xmlns:a="http://schemas.openxmlformats.org/drawingml/2006/main" xmlns:r="http://schemas.openxmlformats.org/officeDocument/2006/relationships" xmlns:p="http://schemas.openxmlformats.org/presentationml/2006/main">
   <p:cSld>
     <p:spTree>
       <p:nvGrpSpPr>
@@ -10373,7 +10542,14 @@
         <p:cNvGrpSpPr/>
         <p:nvPr/>
       </p:nvGrpSpPr>
-      <p:grpSpPr/>
+      <p:grpSpPr>
+        <a:xfrm>
+          <a:off x="0" y="0"/>
+          <a:ext cx="0" cy="0"/>
+          <a:chOff x="0" y="0"/>
+          <a:chExt cx="0" cy="0"/>
+        </a:xfrm>
+      </p:grpSpPr>
       <p:sp>
         <p:nvSpPr>
           <p:cNvPr id="2" name="Rectangle 1"/>
@@ -10415,6 +10591,7 @@
           <a:lstStyle/>
           <a:p>
             <a:pPr algn="ctr"/>
+            <a:endParaRPr/>
           </a:p>
         </p:txBody>
       </p:sp>
@@ -10608,7 +10785,7 @@
 </file>
 
 <file path=ppt/slides/slide29.xml><?xml version="1.0" encoding="utf-8"?>
-<p:sld xmlns:a="http://schemas.openxmlformats.org/drawingml/2006/main" xmlns:p="http://schemas.openxmlformats.org/presentationml/2006/main" xmlns:r="http://schemas.openxmlformats.org/officeDocument/2006/relationships">
+<p:sld xmlns:a="http://schemas.openxmlformats.org/drawingml/2006/main" xmlns:r="http://schemas.openxmlformats.org/officeDocument/2006/relationships" xmlns:p="http://schemas.openxmlformats.org/presentationml/2006/main">
   <p:cSld>
     <p:spTree>
       <p:nvGrpSpPr>
@@ -10616,7 +10793,14 @@
         <p:cNvGrpSpPr/>
         <p:nvPr/>
       </p:nvGrpSpPr>
-      <p:grpSpPr/>
+      <p:grpSpPr>
+        <a:xfrm>
+          <a:off x="0" y="0"/>
+          <a:ext cx="0" cy="0"/>
+          <a:chOff x="0" y="0"/>
+          <a:chExt cx="0" cy="0"/>
+        </a:xfrm>
+      </p:grpSpPr>
       <p:sp>
         <p:nvSpPr>
           <p:cNvPr id="2" name="Rectangle 1"/>
@@ -10658,6 +10842,7 @@
           <a:lstStyle/>
           <a:p>
             <a:pPr algn="ctr"/>
+            <a:endParaRPr/>
           </a:p>
         </p:txBody>
       </p:sp>
@@ -10851,7 +11036,7 @@
 </file>
 
 <file path=ppt/slides/slide3.xml><?xml version="1.0" encoding="utf-8"?>
-<p:sld xmlns:a="http://schemas.openxmlformats.org/drawingml/2006/main" xmlns:p="http://schemas.openxmlformats.org/presentationml/2006/main" xmlns:r="http://schemas.openxmlformats.org/officeDocument/2006/relationships">
+<p:sld xmlns:a="http://schemas.openxmlformats.org/drawingml/2006/main" xmlns:r="http://schemas.openxmlformats.org/officeDocument/2006/relationships" xmlns:p="http://schemas.openxmlformats.org/presentationml/2006/main">
   <p:cSld>
     <p:spTree>
       <p:nvGrpSpPr>
@@ -10859,7 +11044,14 @@
         <p:cNvGrpSpPr/>
         <p:nvPr/>
       </p:nvGrpSpPr>
-      <p:grpSpPr/>
+      <p:grpSpPr>
+        <a:xfrm>
+          <a:off x="0" y="0"/>
+          <a:ext cx="0" cy="0"/>
+          <a:chOff x="0" y="0"/>
+          <a:chExt cx="0" cy="0"/>
+        </a:xfrm>
+      </p:grpSpPr>
       <p:sp>
         <p:nvSpPr>
           <p:cNvPr id="2" name="Rectangle 1"/>
@@ -10901,6 +11093,7 @@
           <a:lstStyle/>
           <a:p>
             <a:pPr algn="ctr"/>
+            <a:endParaRPr/>
           </a:p>
         </p:txBody>
       </p:sp>
@@ -11087,7 +11280,7 @@
 </file>
 
 <file path=ppt/slides/slide30.xml><?xml version="1.0" encoding="utf-8"?>
-<p:sld xmlns:a="http://schemas.openxmlformats.org/drawingml/2006/main" xmlns:p="http://schemas.openxmlformats.org/presentationml/2006/main" xmlns:r="http://schemas.openxmlformats.org/officeDocument/2006/relationships">
+<p:sld xmlns:a="http://schemas.openxmlformats.org/drawingml/2006/main" xmlns:r="http://schemas.openxmlformats.org/officeDocument/2006/relationships" xmlns:p="http://schemas.openxmlformats.org/presentationml/2006/main">
   <p:cSld>
     <p:spTree>
       <p:nvGrpSpPr>
@@ -11095,7 +11288,14 @@
         <p:cNvGrpSpPr/>
         <p:nvPr/>
       </p:nvGrpSpPr>
-      <p:grpSpPr/>
+      <p:grpSpPr>
+        <a:xfrm>
+          <a:off x="0" y="0"/>
+          <a:ext cx="0" cy="0"/>
+          <a:chOff x="0" y="0"/>
+          <a:chExt cx="0" cy="0"/>
+        </a:xfrm>
+      </p:grpSpPr>
       <p:sp>
         <p:nvSpPr>
           <p:cNvPr id="2" name="Rectangle 1"/>
@@ -11137,6 +11337,7 @@
           <a:lstStyle/>
           <a:p>
             <a:pPr algn="ctr"/>
+            <a:endParaRPr/>
           </a:p>
         </p:txBody>
       </p:sp>
@@ -11330,7 +11531,7 @@
 </file>
 
 <file path=ppt/slides/slide31.xml><?xml version="1.0" encoding="utf-8"?>
-<p:sld xmlns:a="http://schemas.openxmlformats.org/drawingml/2006/main" xmlns:p="http://schemas.openxmlformats.org/presentationml/2006/main" xmlns:r="http://schemas.openxmlformats.org/officeDocument/2006/relationships">
+<p:sld xmlns:a="http://schemas.openxmlformats.org/drawingml/2006/main" xmlns:r="http://schemas.openxmlformats.org/officeDocument/2006/relationships" xmlns:p="http://schemas.openxmlformats.org/presentationml/2006/main">
   <p:cSld>
     <p:spTree>
       <p:nvGrpSpPr>
@@ -11338,7 +11539,14 @@
         <p:cNvGrpSpPr/>
         <p:nvPr/>
       </p:nvGrpSpPr>
-      <p:grpSpPr/>
+      <p:grpSpPr>
+        <a:xfrm>
+          <a:off x="0" y="0"/>
+          <a:ext cx="0" cy="0"/>
+          <a:chOff x="0" y="0"/>
+          <a:chExt cx="0" cy="0"/>
+        </a:xfrm>
+      </p:grpSpPr>
       <p:sp>
         <p:nvSpPr>
           <p:cNvPr id="2" name="Rectangle 1"/>
@@ -11380,6 +11588,7 @@
           <a:lstStyle/>
           <a:p>
             <a:pPr algn="ctr"/>
+            <a:endParaRPr/>
           </a:p>
         </p:txBody>
       </p:sp>
@@ -11502,6 +11711,7 @@
           <a:lstStyle/>
           <a:p>
             <a:pPr algn="ctr"/>
+            <a:endParaRPr/>
           </a:p>
         </p:txBody>
       </p:sp>
@@ -11526,7 +11736,9 @@
             <a:spAutoFit/>
           </a:bodyPr>
           <a:lstStyle/>
-          <a:p/>
+          <a:p>
+            <a:endParaRPr/>
+          </a:p>
         </p:txBody>
       </p:sp>
     </p:spTree>
@@ -11538,7 +11750,7 @@
 </file>
 
 <file path=ppt/slides/slide32.xml><?xml version="1.0" encoding="utf-8"?>
-<p:sld xmlns:a="http://schemas.openxmlformats.org/drawingml/2006/main" xmlns:p="http://schemas.openxmlformats.org/presentationml/2006/main" xmlns:r="http://schemas.openxmlformats.org/officeDocument/2006/relationships">
+<p:sld xmlns:a="http://schemas.openxmlformats.org/drawingml/2006/main" xmlns:r="http://schemas.openxmlformats.org/officeDocument/2006/relationships" xmlns:p="http://schemas.openxmlformats.org/presentationml/2006/main">
   <p:cSld>
     <p:spTree>
       <p:nvGrpSpPr>
@@ -11546,7 +11758,14 @@
         <p:cNvGrpSpPr/>
         <p:nvPr/>
       </p:nvGrpSpPr>
-      <p:grpSpPr/>
+      <p:grpSpPr>
+        <a:xfrm>
+          <a:off x="0" y="0"/>
+          <a:ext cx="0" cy="0"/>
+          <a:chOff x="0" y="0"/>
+          <a:chExt cx="0" cy="0"/>
+        </a:xfrm>
+      </p:grpSpPr>
       <p:sp>
         <p:nvSpPr>
           <p:cNvPr id="2" name="Rectangle 1"/>
@@ -11588,6 +11807,7 @@
           <a:lstStyle/>
           <a:p>
             <a:pPr algn="ctr"/>
+            <a:endParaRPr/>
           </a:p>
         </p:txBody>
       </p:sp>
@@ -11781,7 +12001,7 @@
 </file>
 
 <file path=ppt/slides/slide33.xml><?xml version="1.0" encoding="utf-8"?>
-<p:sld xmlns:a="http://schemas.openxmlformats.org/drawingml/2006/main" xmlns:p="http://schemas.openxmlformats.org/presentationml/2006/main" xmlns:r="http://schemas.openxmlformats.org/officeDocument/2006/relationships">
+<p:sld xmlns:a="http://schemas.openxmlformats.org/drawingml/2006/main" xmlns:r="http://schemas.openxmlformats.org/officeDocument/2006/relationships" xmlns:p="http://schemas.openxmlformats.org/presentationml/2006/main">
   <p:cSld>
     <p:spTree>
       <p:nvGrpSpPr>
@@ -11789,7 +12009,14 @@
         <p:cNvGrpSpPr/>
         <p:nvPr/>
       </p:nvGrpSpPr>
-      <p:grpSpPr/>
+      <p:grpSpPr>
+        <a:xfrm>
+          <a:off x="0" y="0"/>
+          <a:ext cx="0" cy="0"/>
+          <a:chOff x="0" y="0"/>
+          <a:chExt cx="0" cy="0"/>
+        </a:xfrm>
+      </p:grpSpPr>
       <p:sp>
         <p:nvSpPr>
           <p:cNvPr id="2" name="Rectangle 1"/>
@@ -11831,6 +12058,7 @@
           <a:lstStyle/>
           <a:p>
             <a:pPr algn="ctr"/>
+            <a:endParaRPr/>
           </a:p>
         </p:txBody>
       </p:sp>
@@ -12024,7 +12252,7 @@
 </file>
 
 <file path=ppt/slides/slide34.xml><?xml version="1.0" encoding="utf-8"?>
-<p:sld xmlns:a="http://schemas.openxmlformats.org/drawingml/2006/main" xmlns:p="http://schemas.openxmlformats.org/presentationml/2006/main" xmlns:r="http://schemas.openxmlformats.org/officeDocument/2006/relationships">
+<p:sld xmlns:a="http://schemas.openxmlformats.org/drawingml/2006/main" xmlns:r="http://schemas.openxmlformats.org/officeDocument/2006/relationships" xmlns:p="http://schemas.openxmlformats.org/presentationml/2006/main">
   <p:cSld>
     <p:spTree>
       <p:nvGrpSpPr>
@@ -12032,7 +12260,14 @@
         <p:cNvGrpSpPr/>
         <p:nvPr/>
       </p:nvGrpSpPr>
-      <p:grpSpPr/>
+      <p:grpSpPr>
+        <a:xfrm>
+          <a:off x="0" y="0"/>
+          <a:ext cx="0" cy="0"/>
+          <a:chOff x="0" y="0"/>
+          <a:chExt cx="0" cy="0"/>
+        </a:xfrm>
+      </p:grpSpPr>
       <p:sp>
         <p:nvSpPr>
           <p:cNvPr id="2" name="Rectangle 1"/>
@@ -12074,6 +12309,7 @@
           <a:lstStyle/>
           <a:p>
             <a:pPr algn="ctr"/>
+            <a:endParaRPr/>
           </a:p>
         </p:txBody>
       </p:sp>
@@ -12267,7 +12503,7 @@
 </file>
 
 <file path=ppt/slides/slide35.xml><?xml version="1.0" encoding="utf-8"?>
-<p:sld xmlns:a="http://schemas.openxmlformats.org/drawingml/2006/main" xmlns:p="http://schemas.openxmlformats.org/presentationml/2006/main" xmlns:r="http://schemas.openxmlformats.org/officeDocument/2006/relationships">
+<p:sld xmlns:a="http://schemas.openxmlformats.org/drawingml/2006/main" xmlns:r="http://schemas.openxmlformats.org/officeDocument/2006/relationships" xmlns:p="http://schemas.openxmlformats.org/presentationml/2006/main">
   <p:cSld>
     <p:spTree>
       <p:nvGrpSpPr>
@@ -12275,7 +12511,14 @@
         <p:cNvGrpSpPr/>
         <p:nvPr/>
       </p:nvGrpSpPr>
-      <p:grpSpPr/>
+      <p:grpSpPr>
+        <a:xfrm>
+          <a:off x="0" y="0"/>
+          <a:ext cx="0" cy="0"/>
+          <a:chOff x="0" y="0"/>
+          <a:chExt cx="0" cy="0"/>
+        </a:xfrm>
+      </p:grpSpPr>
       <p:sp>
         <p:nvSpPr>
           <p:cNvPr id="2" name="Rectangle 1"/>
@@ -12317,6 +12560,7 @@
           <a:lstStyle/>
           <a:p>
             <a:pPr algn="ctr"/>
+            <a:endParaRPr/>
           </a:p>
         </p:txBody>
       </p:sp>
@@ -12439,6 +12683,7 @@
           <a:lstStyle/>
           <a:p>
             <a:pPr algn="ctr"/>
+            <a:endParaRPr/>
           </a:p>
         </p:txBody>
       </p:sp>
@@ -12463,7 +12708,9 @@
             <a:spAutoFit/>
           </a:bodyPr>
           <a:lstStyle/>
-          <a:p/>
+          <a:p>
+            <a:endParaRPr/>
+          </a:p>
         </p:txBody>
       </p:sp>
     </p:spTree>
@@ -12475,7 +12722,7 @@
 </file>
 
 <file path=ppt/slides/slide36.xml><?xml version="1.0" encoding="utf-8"?>
-<p:sld xmlns:a="http://schemas.openxmlformats.org/drawingml/2006/main" xmlns:p="http://schemas.openxmlformats.org/presentationml/2006/main" xmlns:r="http://schemas.openxmlformats.org/officeDocument/2006/relationships">
+<p:sld xmlns:a="http://schemas.openxmlformats.org/drawingml/2006/main" xmlns:r="http://schemas.openxmlformats.org/officeDocument/2006/relationships" xmlns:p="http://schemas.openxmlformats.org/presentationml/2006/main">
   <p:cSld>
     <p:spTree>
       <p:nvGrpSpPr>
@@ -12483,7 +12730,14 @@
         <p:cNvGrpSpPr/>
         <p:nvPr/>
       </p:nvGrpSpPr>
-      <p:grpSpPr/>
+      <p:grpSpPr>
+        <a:xfrm>
+          <a:off x="0" y="0"/>
+          <a:ext cx="0" cy="0"/>
+          <a:chOff x="0" y="0"/>
+          <a:chExt cx="0" cy="0"/>
+        </a:xfrm>
+      </p:grpSpPr>
       <p:sp>
         <p:nvSpPr>
           <p:cNvPr id="2" name="Rectangle 1"/>
@@ -12525,6 +12779,7 @@
           <a:lstStyle/>
           <a:p>
             <a:pPr algn="ctr"/>
+            <a:endParaRPr/>
           </a:p>
         </p:txBody>
       </p:sp>
@@ -12718,7 +12973,7 @@
 </file>
 
 <file path=ppt/slides/slide37.xml><?xml version="1.0" encoding="utf-8"?>
-<p:sld xmlns:a="http://schemas.openxmlformats.org/drawingml/2006/main" xmlns:p="http://schemas.openxmlformats.org/presentationml/2006/main" xmlns:r="http://schemas.openxmlformats.org/officeDocument/2006/relationships">
+<p:sld xmlns:a="http://schemas.openxmlformats.org/drawingml/2006/main" xmlns:r="http://schemas.openxmlformats.org/officeDocument/2006/relationships" xmlns:p="http://schemas.openxmlformats.org/presentationml/2006/main">
   <p:cSld>
     <p:spTree>
       <p:nvGrpSpPr>
@@ -12726,7 +12981,14 @@
         <p:cNvGrpSpPr/>
         <p:nvPr/>
       </p:nvGrpSpPr>
-      <p:grpSpPr/>
+      <p:grpSpPr>
+        <a:xfrm>
+          <a:off x="0" y="0"/>
+          <a:ext cx="0" cy="0"/>
+          <a:chOff x="0" y="0"/>
+          <a:chExt cx="0" cy="0"/>
+        </a:xfrm>
+      </p:grpSpPr>
       <p:sp>
         <p:nvSpPr>
           <p:cNvPr id="2" name="Rectangle 1"/>
@@ -12768,6 +13030,7 @@
           <a:lstStyle/>
           <a:p>
             <a:pPr algn="ctr"/>
+            <a:endParaRPr/>
           </a:p>
         </p:txBody>
       </p:sp>
@@ -12961,7 +13224,7 @@
 </file>
 
 <file path=ppt/slides/slide38.xml><?xml version="1.0" encoding="utf-8"?>
-<p:sld xmlns:a="http://schemas.openxmlformats.org/drawingml/2006/main" xmlns:p="http://schemas.openxmlformats.org/presentationml/2006/main" xmlns:r="http://schemas.openxmlformats.org/officeDocument/2006/relationships">
+<p:sld xmlns:a="http://schemas.openxmlformats.org/drawingml/2006/main" xmlns:r="http://schemas.openxmlformats.org/officeDocument/2006/relationships" xmlns:p="http://schemas.openxmlformats.org/presentationml/2006/main">
   <p:cSld>
     <p:spTree>
       <p:nvGrpSpPr>
@@ -12969,7 +13232,14 @@
         <p:cNvGrpSpPr/>
         <p:nvPr/>
       </p:nvGrpSpPr>
-      <p:grpSpPr/>
+      <p:grpSpPr>
+        <a:xfrm>
+          <a:off x="0" y="0"/>
+          <a:ext cx="0" cy="0"/>
+          <a:chOff x="0" y="0"/>
+          <a:chExt cx="0" cy="0"/>
+        </a:xfrm>
+      </p:grpSpPr>
       <p:sp>
         <p:nvSpPr>
           <p:cNvPr id="2" name="Rectangle 1"/>
@@ -13011,6 +13281,7 @@
           <a:lstStyle/>
           <a:p>
             <a:pPr algn="ctr"/>
+            <a:endParaRPr/>
           </a:p>
         </p:txBody>
       </p:sp>
@@ -13204,7 +13475,7 @@
 </file>
 
 <file path=ppt/slides/slide39.xml><?xml version="1.0" encoding="utf-8"?>
-<p:sld xmlns:a="http://schemas.openxmlformats.org/drawingml/2006/main" xmlns:p="http://schemas.openxmlformats.org/presentationml/2006/main" xmlns:r="http://schemas.openxmlformats.org/officeDocument/2006/relationships">
+<p:sld xmlns:a="http://schemas.openxmlformats.org/drawingml/2006/main" xmlns:r="http://schemas.openxmlformats.org/officeDocument/2006/relationships" xmlns:p="http://schemas.openxmlformats.org/presentationml/2006/main">
   <p:cSld>
     <p:spTree>
       <p:nvGrpSpPr>
@@ -13212,7 +13483,14 @@
         <p:cNvGrpSpPr/>
         <p:nvPr/>
       </p:nvGrpSpPr>
-      <p:grpSpPr/>
+      <p:grpSpPr>
+        <a:xfrm>
+          <a:off x="0" y="0"/>
+          <a:ext cx="0" cy="0"/>
+          <a:chOff x="0" y="0"/>
+          <a:chExt cx="0" cy="0"/>
+        </a:xfrm>
+      </p:grpSpPr>
       <p:sp>
         <p:nvSpPr>
           <p:cNvPr id="2" name="Rectangle 1"/>
@@ -13254,6 +13532,7 @@
           <a:lstStyle/>
           <a:p>
             <a:pPr algn="ctr"/>
+            <a:endParaRPr/>
           </a:p>
         </p:txBody>
       </p:sp>
@@ -13447,7 +13726,7 @@
 </file>
 
 <file path=ppt/slides/slide4.xml><?xml version="1.0" encoding="utf-8"?>
-<p:sld xmlns:a="http://schemas.openxmlformats.org/drawingml/2006/main" xmlns:p="http://schemas.openxmlformats.org/presentationml/2006/main" xmlns:r="http://schemas.openxmlformats.org/officeDocument/2006/relationships">
+<p:sld xmlns:a="http://schemas.openxmlformats.org/drawingml/2006/main" xmlns:r="http://schemas.openxmlformats.org/officeDocument/2006/relationships" xmlns:p="http://schemas.openxmlformats.org/presentationml/2006/main">
   <p:cSld>
     <p:spTree>
       <p:nvGrpSpPr>
@@ -13455,7 +13734,14 @@
         <p:cNvGrpSpPr/>
         <p:nvPr/>
       </p:nvGrpSpPr>
-      <p:grpSpPr/>
+      <p:grpSpPr>
+        <a:xfrm>
+          <a:off x="0" y="0"/>
+          <a:ext cx="0" cy="0"/>
+          <a:chOff x="0" y="0"/>
+          <a:chExt cx="0" cy="0"/>
+        </a:xfrm>
+      </p:grpSpPr>
       <p:sp>
         <p:nvSpPr>
           <p:cNvPr id="2" name="Rectangle 1"/>
@@ -13497,6 +13783,7 @@
           <a:lstStyle/>
           <a:p>
             <a:pPr algn="ctr"/>
+            <a:endParaRPr/>
           </a:p>
         </p:txBody>
       </p:sp>
@@ -13690,7 +13977,7 @@
 </file>
 
 <file path=ppt/slides/slide5.xml><?xml version="1.0" encoding="utf-8"?>
-<p:sld xmlns:a="http://schemas.openxmlformats.org/drawingml/2006/main" xmlns:p="http://schemas.openxmlformats.org/presentationml/2006/main" xmlns:r="http://schemas.openxmlformats.org/officeDocument/2006/relationships">
+<p:sld xmlns:a="http://schemas.openxmlformats.org/drawingml/2006/main" xmlns:r="http://schemas.openxmlformats.org/officeDocument/2006/relationships" xmlns:p="http://schemas.openxmlformats.org/presentationml/2006/main">
   <p:cSld>
     <p:spTree>
       <p:nvGrpSpPr>
@@ -13698,7 +13985,14 @@
         <p:cNvGrpSpPr/>
         <p:nvPr/>
       </p:nvGrpSpPr>
-      <p:grpSpPr/>
+      <p:grpSpPr>
+        <a:xfrm>
+          <a:off x="0" y="0"/>
+          <a:ext cx="0" cy="0"/>
+          <a:chOff x="0" y="0"/>
+          <a:chExt cx="0" cy="0"/>
+        </a:xfrm>
+      </p:grpSpPr>
       <p:sp>
         <p:nvSpPr>
           <p:cNvPr id="2" name="Rectangle 1"/>
@@ -13740,6 +14034,7 @@
           <a:lstStyle/>
           <a:p>
             <a:pPr algn="ctr"/>
+            <a:endParaRPr/>
           </a:p>
         </p:txBody>
       </p:sp>
@@ -13862,6 +14157,7 @@
           <a:lstStyle/>
           <a:p>
             <a:pPr algn="ctr"/>
+            <a:endParaRPr/>
           </a:p>
         </p:txBody>
       </p:sp>
@@ -13929,7 +14225,7 @@
 </file>
 
 <file path=ppt/slides/slide6.xml><?xml version="1.0" encoding="utf-8"?>
-<p:sld xmlns:a="http://schemas.openxmlformats.org/drawingml/2006/main" xmlns:p="http://schemas.openxmlformats.org/presentationml/2006/main" xmlns:r="http://schemas.openxmlformats.org/officeDocument/2006/relationships">
+<p:sld xmlns:a="http://schemas.openxmlformats.org/drawingml/2006/main" xmlns:r="http://schemas.openxmlformats.org/officeDocument/2006/relationships" xmlns:p="http://schemas.openxmlformats.org/presentationml/2006/main">
   <p:cSld>
     <p:spTree>
       <p:nvGrpSpPr>
@@ -13937,7 +14233,14 @@
         <p:cNvGrpSpPr/>
         <p:nvPr/>
       </p:nvGrpSpPr>
-      <p:grpSpPr/>
+      <p:grpSpPr>
+        <a:xfrm>
+          <a:off x="0" y="0"/>
+          <a:ext cx="0" cy="0"/>
+          <a:chOff x="0" y="0"/>
+          <a:chExt cx="0" cy="0"/>
+        </a:xfrm>
+      </p:grpSpPr>
       <p:sp>
         <p:nvSpPr>
           <p:cNvPr id="2" name="Rectangle 1"/>
@@ -13979,6 +14282,7 @@
           <a:lstStyle/>
           <a:p>
             <a:pPr algn="ctr"/>
+            <a:endParaRPr/>
           </a:p>
         </p:txBody>
       </p:sp>
@@ -14172,7 +14476,7 @@
 </file>
 
 <file path=ppt/slides/slide7.xml><?xml version="1.0" encoding="utf-8"?>
-<p:sld xmlns:a="http://schemas.openxmlformats.org/drawingml/2006/main" xmlns:p="http://schemas.openxmlformats.org/presentationml/2006/main" xmlns:r="http://schemas.openxmlformats.org/officeDocument/2006/relationships">
+<p:sld xmlns:a="http://schemas.openxmlformats.org/drawingml/2006/main" xmlns:r="http://schemas.openxmlformats.org/officeDocument/2006/relationships" xmlns:p="http://schemas.openxmlformats.org/presentationml/2006/main">
   <p:cSld>
     <p:spTree>
       <p:nvGrpSpPr>
@@ -14180,7 +14484,14 @@
         <p:cNvGrpSpPr/>
         <p:nvPr/>
       </p:nvGrpSpPr>
-      <p:grpSpPr/>
+      <p:grpSpPr>
+        <a:xfrm>
+          <a:off x="0" y="0"/>
+          <a:ext cx="0" cy="0"/>
+          <a:chOff x="0" y="0"/>
+          <a:chExt cx="0" cy="0"/>
+        </a:xfrm>
+      </p:grpSpPr>
       <p:sp>
         <p:nvSpPr>
           <p:cNvPr id="2" name="Rectangle 1"/>
@@ -14222,6 +14533,7 @@
           <a:lstStyle/>
           <a:p>
             <a:pPr algn="ctr"/>
+            <a:endParaRPr/>
           </a:p>
         </p:txBody>
       </p:sp>
@@ -14415,7 +14727,7 @@
 </file>
 
 <file path=ppt/slides/slide8.xml><?xml version="1.0" encoding="utf-8"?>
-<p:sld xmlns:a="http://schemas.openxmlformats.org/drawingml/2006/main" xmlns:p="http://schemas.openxmlformats.org/presentationml/2006/main" xmlns:r="http://schemas.openxmlformats.org/officeDocument/2006/relationships">
+<p:sld xmlns:a="http://schemas.openxmlformats.org/drawingml/2006/main" xmlns:r="http://schemas.openxmlformats.org/officeDocument/2006/relationships" xmlns:p="http://schemas.openxmlformats.org/presentationml/2006/main">
   <p:cSld>
     <p:spTree>
       <p:nvGrpSpPr>
@@ -14423,7 +14735,14 @@
         <p:cNvGrpSpPr/>
         <p:nvPr/>
       </p:nvGrpSpPr>
-      <p:grpSpPr/>
+      <p:grpSpPr>
+        <a:xfrm>
+          <a:off x="0" y="0"/>
+          <a:ext cx="0" cy="0"/>
+          <a:chOff x="0" y="0"/>
+          <a:chExt cx="0" cy="0"/>
+        </a:xfrm>
+      </p:grpSpPr>
       <p:sp>
         <p:nvSpPr>
           <p:cNvPr id="2" name="Rectangle 1"/>
@@ -14465,6 +14784,7 @@
           <a:lstStyle/>
           <a:p>
             <a:pPr algn="ctr"/>
+            <a:endParaRPr/>
           </a:p>
         </p:txBody>
       </p:sp>
@@ -14658,7 +14978,7 @@
 </file>
 
 <file path=ppt/slides/slide9.xml><?xml version="1.0" encoding="utf-8"?>
-<p:sld xmlns:a="http://schemas.openxmlformats.org/drawingml/2006/main" xmlns:p="http://schemas.openxmlformats.org/presentationml/2006/main" xmlns:r="http://schemas.openxmlformats.org/officeDocument/2006/relationships">
+<p:sld xmlns:a="http://schemas.openxmlformats.org/drawingml/2006/main" xmlns:r="http://schemas.openxmlformats.org/officeDocument/2006/relationships" xmlns:p="http://schemas.openxmlformats.org/presentationml/2006/main">
   <p:cSld>
     <p:spTree>
       <p:nvGrpSpPr>
@@ -14666,7 +14986,14 @@
         <p:cNvGrpSpPr/>
         <p:nvPr/>
       </p:nvGrpSpPr>
-      <p:grpSpPr/>
+      <p:grpSpPr>
+        <a:xfrm>
+          <a:off x="0" y="0"/>
+          <a:ext cx="0" cy="0"/>
+          <a:chOff x="0" y="0"/>
+          <a:chExt cx="0" cy="0"/>
+        </a:xfrm>
+      </p:grpSpPr>
       <p:sp>
         <p:nvSpPr>
           <p:cNvPr id="2" name="Rectangle 1"/>
@@ -14708,6 +15035,7 @@
           <a:lstStyle/>
           <a:p>
             <a:pPr algn="ctr"/>
+            <a:endParaRPr/>
           </a:p>
         </p:txBody>
       </p:sp>
@@ -15221,7 +15549,7 @@
 </file>
 
 <file path=ppt/theme/theme2.xml><?xml version="1.0" encoding="utf-8"?>
-<a:theme xmlns:a="http://schemas.openxmlformats.org/drawingml/2006/main" name="Office Theme">
+<a:theme xmlns:a="http://schemas.openxmlformats.org/drawingml/2006/main" name="Office 테마">
   <a:themeElements>
     <a:clrScheme name="Office">
       <a:dk1>
@@ -15231,44 +15559,44 @@
         <a:sysClr val="window" lastClr="FFFFFF"/>
       </a:lt1>
       <a:dk2>
-        <a:srgbClr val="1F497D"/>
+        <a:srgbClr val="0E2841"/>
       </a:dk2>
       <a:lt2>
-        <a:srgbClr val="EEECE1"/>
+        <a:srgbClr val="E8E8E8"/>
       </a:lt2>
       <a:accent1>
-        <a:srgbClr val="4F81BD"/>
+        <a:srgbClr val="156082"/>
       </a:accent1>
       <a:accent2>
-        <a:srgbClr val="C0504D"/>
+        <a:srgbClr val="E97132"/>
       </a:accent2>
       <a:accent3>
-        <a:srgbClr val="9BBB59"/>
+        <a:srgbClr val="196B24"/>
       </a:accent3>
       <a:accent4>
-        <a:srgbClr val="8064A2"/>
+        <a:srgbClr val="0F9ED5"/>
       </a:accent4>
       <a:accent5>
-        <a:srgbClr val="4BACC6"/>
+        <a:srgbClr val="A02B93"/>
       </a:accent5>
       <a:accent6>
-        <a:srgbClr val="F79646"/>
+        <a:srgbClr val="4EA72E"/>
       </a:accent6>
       <a:hlink>
-        <a:srgbClr val="0000FF"/>
+        <a:srgbClr val="467886"/>
       </a:hlink>
       <a:folHlink>
-        <a:srgbClr val="800080"/>
+        <a:srgbClr val="96607D"/>
       </a:folHlink>
     </a:clrScheme>
     <a:fontScheme name="Office">
       <a:majorFont>
-        <a:latin typeface="Calibri"/>
+        <a:latin typeface="맑은 고딕" panose="02110004020202020204"/>
         <a:ea typeface=""/>
         <a:cs typeface=""/>
-        <a:font script="Jpan" typeface="ＭＳ Ｐゴシック"/>
+        <a:font script="Jpan" typeface="游ゴシック Light"/>
         <a:font script="Hang" typeface="맑은 고딕"/>
-        <a:font script="Hans" typeface="宋体"/>
+        <a:font script="Hans" typeface="等线 Light"/>
         <a:font script="Hant" typeface="新細明體"/>
         <a:font script="Arab" typeface="Times New Roman"/>
         <a:font script="Hebr" typeface="Times New Roman"/>
@@ -15296,14 +15624,31 @@
         <a:font script="Viet" typeface="Times New Roman"/>
         <a:font script="Uigh" typeface="Microsoft Uighur"/>
         <a:font script="Geor" typeface="Sylfaen"/>
+        <a:font script="Armn" typeface="Arial"/>
+        <a:font script="Bugi" typeface="Leelawadee UI"/>
+        <a:font script="Bopo" typeface="Microsoft JhengHei"/>
+        <a:font script="Java" typeface="Javanese Text"/>
+        <a:font script="Lisu" typeface="Segoe UI"/>
+        <a:font script="Mymr" typeface="Myanmar Text"/>
+        <a:font script="Nkoo" typeface="Ebrima"/>
+        <a:font script="Olck" typeface="Nirmala UI"/>
+        <a:font script="Osma" typeface="Ebrima"/>
+        <a:font script="Phag" typeface="Phagspa"/>
+        <a:font script="Syrn" typeface="Estrangelo Edessa"/>
+        <a:font script="Syrj" typeface="Estrangelo Edessa"/>
+        <a:font script="Syre" typeface="Estrangelo Edessa"/>
+        <a:font script="Sora" typeface="Nirmala UI"/>
+        <a:font script="Tale" typeface="Microsoft Tai Le"/>
+        <a:font script="Talu" typeface="Microsoft New Tai Lue"/>
+        <a:font script="Tfng" typeface="Ebrima"/>
       </a:majorFont>
       <a:minorFont>
-        <a:latin typeface="Calibri"/>
+        <a:latin typeface="맑은 고딕" panose="02110004020202020204"/>
         <a:ea typeface=""/>
         <a:cs typeface=""/>
-        <a:font script="Jpan" typeface="ＭＳ Ｐゴシック"/>
+        <a:font script="Jpan" typeface="游ゴシック"/>
         <a:font script="Hang" typeface="맑은 고딕"/>
-        <a:font script="Hans" typeface="宋体"/>
+        <a:font script="Hans" typeface="等线"/>
         <a:font script="Hant" typeface="新細明體"/>
         <a:font script="Arab" typeface="Arial"/>
         <a:font script="Hebr" typeface="Arial"/>
@@ -15331,6 +15676,23 @@
         <a:font script="Viet" typeface="Arial"/>
         <a:font script="Uigh" typeface="Microsoft Uighur"/>
         <a:font script="Geor" typeface="Sylfaen"/>
+        <a:font script="Armn" typeface="Arial"/>
+        <a:font script="Bugi" typeface="Leelawadee UI"/>
+        <a:font script="Bopo" typeface="Microsoft JhengHei"/>
+        <a:font script="Java" typeface="Javanese Text"/>
+        <a:font script="Lisu" typeface="Segoe UI"/>
+        <a:font script="Mymr" typeface="Myanmar Text"/>
+        <a:font script="Nkoo" typeface="Ebrima"/>
+        <a:font script="Olck" typeface="Nirmala UI"/>
+        <a:font script="Osma" typeface="Ebrima"/>
+        <a:font script="Phag" typeface="Phagspa"/>
+        <a:font script="Syrn" typeface="Estrangelo Edessa"/>
+        <a:font script="Syrj" typeface="Estrangelo Edessa"/>
+        <a:font script="Syre" typeface="Estrangelo Edessa"/>
+        <a:font script="Sora" typeface="Nirmala UI"/>
+        <a:font script="Tale" typeface="Microsoft Tai Le"/>
+        <a:font script="Talu" typeface="Microsoft New Tai Lue"/>
+        <a:font script="Tfng" typeface="Ebrima"/>
       </a:minorFont>
     </a:fontScheme>
     <a:fmtScheme name="Office">
@@ -15342,180 +15704,136 @@
           <a:gsLst>
             <a:gs pos="0">
               <a:schemeClr val="phClr">
-                <a:tint val="50000"/>
-                <a:satMod val="300000"/>
+                <a:lumMod val="110000"/>
+                <a:satMod val="105000"/>
+                <a:tint val="67000"/>
               </a:schemeClr>
             </a:gs>
-            <a:gs pos="35000">
+            <a:gs pos="50000">
               <a:schemeClr val="phClr">
-                <a:tint val="37000"/>
-                <a:satMod val="300000"/>
+                <a:lumMod val="105000"/>
+                <a:satMod val="103000"/>
+                <a:tint val="73000"/>
               </a:schemeClr>
             </a:gs>
             <a:gs pos="100000">
               <a:schemeClr val="phClr">
-                <a:tint val="15000"/>
-                <a:satMod val="350000"/>
+                <a:lumMod val="105000"/>
+                <a:satMod val="109000"/>
+                <a:tint val="81000"/>
               </a:schemeClr>
             </a:gs>
           </a:gsLst>
-          <a:lin ang="16200000" scaled="1"/>
+          <a:lin ang="5400000" scaled="0"/>
         </a:gradFill>
         <a:gradFill rotWithShape="1">
           <a:gsLst>
             <a:gs pos="0">
               <a:schemeClr val="phClr">
-                <a:tint val="100000"/>
+                <a:satMod val="103000"/>
+                <a:lumMod val="102000"/>
+                <a:tint val="94000"/>
+              </a:schemeClr>
+            </a:gs>
+            <a:gs pos="50000">
+              <a:schemeClr val="phClr">
+                <a:satMod val="110000"/>
+                <a:lumMod val="100000"/>
                 <a:shade val="100000"/>
-                <a:satMod val="130000"/>
               </a:schemeClr>
             </a:gs>
             <a:gs pos="100000">
               <a:schemeClr val="phClr">
-                <a:tint val="50000"/>
-                <a:shade val="100000"/>
-                <a:satMod val="350000"/>
+                <a:lumMod val="99000"/>
+                <a:satMod val="120000"/>
+                <a:shade val="78000"/>
               </a:schemeClr>
             </a:gs>
           </a:gsLst>
-          <a:lin ang="16200000" scaled="0"/>
+          <a:lin ang="5400000" scaled="0"/>
         </a:gradFill>
       </a:fillStyleLst>
       <a:lnStyleLst>
-        <a:ln w="9525" cap="flat" cmpd="sng" algn="ctr">
+        <a:ln w="12700" cap="flat" cmpd="sng" algn="ctr">
           <a:solidFill>
-            <a:schemeClr val="phClr">
-              <a:shade val="95000"/>
-              <a:satMod val="105000"/>
-            </a:schemeClr>
+            <a:schemeClr val="phClr"/>
           </a:solidFill>
           <a:prstDash val="solid"/>
+          <a:miter lim="800000"/>
+        </a:ln>
+        <a:ln w="19050" cap="flat" cmpd="sng" algn="ctr">
+          <a:solidFill>
+            <a:schemeClr val="phClr"/>
+          </a:solidFill>
+          <a:prstDash val="solid"/>
+          <a:miter lim="800000"/>
         </a:ln>
         <a:ln w="25400" cap="flat" cmpd="sng" algn="ctr">
           <a:solidFill>
             <a:schemeClr val="phClr"/>
           </a:solidFill>
           <a:prstDash val="solid"/>
-        </a:ln>
-        <a:ln w="38100" cap="flat" cmpd="sng" algn="ctr">
-          <a:solidFill>
-            <a:schemeClr val="phClr"/>
-          </a:solidFill>
-          <a:prstDash val="solid"/>
+          <a:miter lim="800000"/>
         </a:ln>
       </a:lnStyleLst>
       <a:effectStyleLst>
         <a:effectStyle>
+          <a:effectLst/>
+        </a:effectStyle>
+        <a:effectStyle>
+          <a:effectLst/>
+        </a:effectStyle>
+        <a:effectStyle>
           <a:effectLst>
-            <a:outerShdw blurRad="40000" dist="20000" dir="5400000" rotWithShape="0">
+            <a:outerShdw blurRad="57150" dist="19050" dir="5400000" algn="ctr" rotWithShape="0">
               <a:srgbClr val="000000">
-                <a:alpha val="38000"/>
+                <a:alpha val="63000"/>
               </a:srgbClr>
             </a:outerShdw>
           </a:effectLst>
-        </a:effectStyle>
-        <a:effectStyle>
-          <a:effectLst>
-            <a:outerShdw blurRad="40000" dist="23000" dir="5400000" rotWithShape="0">
-              <a:srgbClr val="000000">
-                <a:alpha val="35000"/>
-              </a:srgbClr>
-            </a:outerShdw>
-          </a:effectLst>
-        </a:effectStyle>
-        <a:effectStyle>
-          <a:effectLst>
-            <a:outerShdw blurRad="40000" dist="23000" dir="5400000" rotWithShape="0">
-              <a:srgbClr val="000000">
-                <a:alpha val="35000"/>
-              </a:srgbClr>
-            </a:outerShdw>
-          </a:effectLst>
-          <a:scene3d>
-            <a:camera prst="orthographicFront">
-              <a:rot lat="0" lon="0" rev="0"/>
-            </a:camera>
-            <a:lightRig rig="threePt" dir="t">
-              <a:rot lat="0" lon="0" rev="1200000"/>
-            </a:lightRig>
-          </a:scene3d>
-          <a:sp3d>
-            <a:bevelT w="63500" h="25400"/>
-          </a:sp3d>
         </a:effectStyle>
       </a:effectStyleLst>
       <a:bgFillStyleLst>
         <a:solidFill>
           <a:schemeClr val="phClr"/>
         </a:solidFill>
+        <a:solidFill>
+          <a:schemeClr val="phClr">
+            <a:tint val="95000"/>
+            <a:satMod val="170000"/>
+          </a:schemeClr>
+        </a:solidFill>
         <a:gradFill rotWithShape="1">
           <a:gsLst>
             <a:gs pos="0">
               <a:schemeClr val="phClr">
-                <a:tint val="40000"/>
-                <a:satMod val="350000"/>
+                <a:tint val="93000"/>
+                <a:satMod val="150000"/>
+                <a:shade val="98000"/>
+                <a:lumMod val="102000"/>
               </a:schemeClr>
             </a:gs>
-            <a:gs pos="40000">
+            <a:gs pos="50000">
               <a:schemeClr val="phClr">
-                <a:tint val="45000"/>
-                <a:shade val="99000"/>
-                <a:satMod val="350000"/>
+                <a:tint val="98000"/>
+                <a:satMod val="130000"/>
+                <a:shade val="90000"/>
+                <a:lumMod val="103000"/>
               </a:schemeClr>
             </a:gs>
             <a:gs pos="100000">
               <a:schemeClr val="phClr">
-                <a:shade val="20000"/>
-                <a:satMod val="255000"/>
+                <a:shade val="63000"/>
+                <a:satMod val="120000"/>
               </a:schemeClr>
             </a:gs>
           </a:gsLst>
-          <a:path path="circle">
-            <a:fillToRect l="50000" t="-80000" r="50000" b="180000"/>
-          </a:path>
-        </a:gradFill>
-        <a:gradFill rotWithShape="1">
-          <a:gsLst>
-            <a:gs pos="0">
-              <a:schemeClr val="phClr">
-                <a:tint val="80000"/>
-                <a:satMod val="300000"/>
-              </a:schemeClr>
-            </a:gs>
-            <a:gs pos="100000">
-              <a:schemeClr val="phClr">
-                <a:shade val="30000"/>
-                <a:satMod val="200000"/>
-              </a:schemeClr>
-            </a:gs>
-          </a:gsLst>
-          <a:path path="circle">
-            <a:fillToRect l="50000" t="50000" r="50000" b="50000"/>
-          </a:path>
+          <a:lin ang="5400000" scaled="0"/>
         </a:gradFill>
       </a:bgFillStyleLst>
     </a:fmtScheme>
   </a:themeElements>
   <a:objectDefaults>
-    <a:spDef>
-      <a:spPr/>
-      <a:bodyPr/>
-      <a:lstStyle/>
-      <a:style>
-        <a:lnRef idx="1">
-          <a:schemeClr val="accent1"/>
-        </a:lnRef>
-        <a:fillRef idx="3">
-          <a:schemeClr val="accent1"/>
-        </a:fillRef>
-        <a:effectRef idx="2">
-          <a:schemeClr val="accent1"/>
-        </a:effectRef>
-        <a:fontRef idx="minor">
-          <a:schemeClr val="lt1"/>
-        </a:fontRef>
-      </a:style>
-    </a:spDef>
     <a:lnDef>
       <a:spPr/>
       <a:bodyPr/>
@@ -15537,5 +15855,10 @@
     </a:lnDef>
   </a:objectDefaults>
   <a:extraClrSchemeLst/>
+  <a:extLst>
+    <a:ext uri="{05A4C25C-085E-4340-85A3-A5531E510DB2}">
+      <thm15:themeFamily xmlns:thm15="http://schemas.microsoft.com/office/thememl/2012/main" name="Office Theme" id="{2E142A2C-CD16-42D6-873A-C26D2A0506FA}" vid="{1BDDFF52-6CD6-40A5-AB3C-68EB2F1E4D0A}"/>
+    </a:ext>
+  </a:extLst>
 </a:theme>
 </file>